--- a/Webshop_Berchtold/Endpräsentation_Webshop.pptx
+++ b/Webshop_Berchtold/Endpräsentation_Webshop.pptx
@@ -152,6 +152,43 @@
     </p:ext>
   </p:extLst>
 </p:presentation>
+</file>
+
+<file path=ppt/revisionInfo.xml><?xml version="1.0" encoding="utf-8"?>
+<p1510:revInfo xmlns:a="http://schemas.openxmlformats.org/drawingml/2006/main" xmlns:r="http://schemas.openxmlformats.org/officeDocument/2006/relationships" xmlns:p1510="http://schemas.microsoft.com/office/powerpoint/2015/10/main">
+  <p1510:revLst>
+    <p1510:client id="{B36E7DE1-3E05-4924-AE1E-02D805B14A3A}" v="1" dt="2026-01-21T06:45:08.694"/>
+  </p1510:revLst>
+</p1510:revInfo>
+</file>
+
+<file path=ppt/changesInfos/changesInfo1.xml><?xml version="1.0" encoding="utf-8"?>
+<pc:chgInfo xmlns:a="http://schemas.openxmlformats.org/drawingml/2006/main" xmlns:r="http://schemas.openxmlformats.org/officeDocument/2006/relationships" xmlns:ac="http://schemas.microsoft.com/office/drawing/2013/main/command" xmlns:pc="http://schemas.microsoft.com/office/powerpoint/2013/main/command">
+  <pc:docChgLst>
+    <pc:chgData name="Laurenz Berchtold" userId="bf8fbad8-d71e-4779-ab0c-ba75c9f855a2" providerId="ADAL" clId="{6AB3C900-B65B-4149-B75B-040B4FBC2CE3}"/>
+    <pc:docChg chg="modSld">
+      <pc:chgData name="Laurenz Berchtold" userId="bf8fbad8-d71e-4779-ab0c-ba75c9f855a2" providerId="ADAL" clId="{6AB3C900-B65B-4149-B75B-040B4FBC2CE3}" dt="2026-01-21T06:33:56.340" v="1" actId="20577"/>
+      <pc:docMkLst>
+        <pc:docMk/>
+      </pc:docMkLst>
+      <pc:sldChg chg="modSp mod">
+        <pc:chgData name="Laurenz Berchtold" userId="bf8fbad8-d71e-4779-ab0c-ba75c9f855a2" providerId="ADAL" clId="{6AB3C900-B65B-4149-B75B-040B4FBC2CE3}" dt="2026-01-21T06:33:56.340" v="1" actId="20577"/>
+        <pc:sldMkLst>
+          <pc:docMk/>
+          <pc:sldMk cId="1017764230" sldId="276"/>
+        </pc:sldMkLst>
+        <pc:spChg chg="mod">
+          <ac:chgData name="Laurenz Berchtold" userId="bf8fbad8-d71e-4779-ab0c-ba75c9f855a2" providerId="ADAL" clId="{6AB3C900-B65B-4149-B75B-040B4FBC2CE3}" dt="2026-01-21T06:33:56.340" v="1" actId="20577"/>
+          <ac:spMkLst>
+            <pc:docMk/>
+            <pc:sldMk cId="1017764230" sldId="276"/>
+            <ac:spMk id="3" creationId="{0CDD7A6D-2E3D-758C-D528-FBC7B37B8387}"/>
+          </ac:spMkLst>
+        </pc:spChg>
+      </pc:sldChg>
+    </pc:docChg>
+  </pc:docChgLst>
+</pc:chgInfo>
 </file>
 
 <file path=ppt/diagrams/colors1.xml><?xml version="1.0" encoding="utf-8"?>
@@ -2434,7 +2471,26 @@
     </dgm:pt>
     <dgm:pt modelId="{DC31E1D1-9C91-468F-BC73-80A3827B437C}" type="pres">
       <dgm:prSet presAssocID="{0E29D4EF-A949-46DC-B9D6-EDE3F482AD21}" presName="iconRect" presStyleLbl="node1" presStyleIdx="2" presStyleCnt="3"/>
-      <dgm:spPr/>
+      <dgm:spPr>
+        <a:blipFill>
+          <a:blip xmlns:r="http://schemas.openxmlformats.org/officeDocument/2006/relationships" r:embed="rId5">
+            <a:extLst>
+              <a:ext uri="{96DAC541-7B7A-43D3-8B79-37D633B846F1}">
+                <asvg:svgBlip xmlns:asvg="http://schemas.microsoft.com/office/drawing/2016/SVG/main" r:embed="rId6"/>
+              </a:ext>
+            </a:extLst>
+          </a:blip>
+          <a:srcRect/>
+          <a:stretch>
+            <a:fillRect/>
+          </a:stretch>
+        </a:blipFill>
+      </dgm:spPr>
+      <dgm:extLst>
+        <a:ext uri="{E40237B7-FDA0-4F09-8148-C483321AD2D9}">
+          <dgm14:cNvPr xmlns:dgm14="http://schemas.microsoft.com/office/drawing/2010/diagram" id="0" name="" descr="Pfeil nach rechts mit einfarbiger Füllung"/>
+        </a:ext>
+      </dgm:extLst>
     </dgm:pt>
     <dgm:pt modelId="{1112D44E-F522-45D4-8729-641EA935C370}" type="pres">
       <dgm:prSet presAssocID="{0E29D4EF-A949-46DC-B9D6-EDE3F482AD21}" presName="spaceRect" presStyleCnt="0"/>
@@ -3677,14 +3733,19 @@
         <a:prstGeom prst="rect">
           <a:avLst/>
         </a:prstGeom>
-        <a:solidFill>
-          <a:schemeClr val="accent1">
-            <a:hueOff val="0"/>
-            <a:satOff val="0"/>
-            <a:lumOff val="0"/>
-            <a:alphaOff val="0"/>
-          </a:schemeClr>
-        </a:solidFill>
+        <a:blipFill>
+          <a:blip xmlns:r="http://schemas.openxmlformats.org/officeDocument/2006/relationships" r:embed="rId5">
+            <a:extLst>
+              <a:ext uri="{96DAC541-7B7A-43D3-8B79-37D633B846F1}">
+                <asvg:svgBlip xmlns:asvg="http://schemas.microsoft.com/office/drawing/2016/SVG/main" r:embed="rId6"/>
+              </a:ext>
+            </a:extLst>
+          </a:blip>
+          <a:srcRect/>
+          <a:stretch>
+            <a:fillRect/>
+          </a:stretch>
+        </a:blipFill>
         <a:ln w="19050" cap="flat" cmpd="sng" algn="ctr">
           <a:solidFill>
             <a:schemeClr val="lt1">
@@ -6516,7 +6577,7 @@
           <a:p>
             <a:fld id="{A87E9BDD-2EC8-4FC5-8506-23DBD186366C}" type="datetimeFigureOut">
               <a:rPr lang="de-AT" smtClean="0"/>
-              <a:t>19.01.2026</a:t>
+              <a:t>21.01.2026</a:t>
             </a:fld>
             <a:endParaRPr lang="de-AT"/>
           </a:p>
@@ -6933,7 +6994,7 @@
           <a:p>
             <a:fld id="{A283F6F3-EBD4-4A96-B1FC-B82E01871E33}" type="datetimeFigureOut">
               <a:rPr lang="de-AT" smtClean="0"/>
-              <a:t>19.01.2026</a:t>
+              <a:t>21.01.2026</a:t>
             </a:fld>
             <a:endParaRPr lang="de-AT"/>
           </a:p>
@@ -7133,7 +7194,7 @@
           <a:p>
             <a:fld id="{A283F6F3-EBD4-4A96-B1FC-B82E01871E33}" type="datetimeFigureOut">
               <a:rPr lang="de-AT" smtClean="0"/>
-              <a:t>19.01.2026</a:t>
+              <a:t>21.01.2026</a:t>
             </a:fld>
             <a:endParaRPr lang="de-AT"/>
           </a:p>
@@ -7343,7 +7404,7 @@
           <a:p>
             <a:fld id="{A283F6F3-EBD4-4A96-B1FC-B82E01871E33}" type="datetimeFigureOut">
               <a:rPr lang="de-AT" smtClean="0"/>
-              <a:t>19.01.2026</a:t>
+              <a:t>21.01.2026</a:t>
             </a:fld>
             <a:endParaRPr lang="de-AT"/>
           </a:p>
@@ -7543,7 +7604,7 @@
           <a:p>
             <a:fld id="{A283F6F3-EBD4-4A96-B1FC-B82E01871E33}" type="datetimeFigureOut">
               <a:rPr lang="de-AT" smtClean="0"/>
-              <a:t>19.01.2026</a:t>
+              <a:t>21.01.2026</a:t>
             </a:fld>
             <a:endParaRPr lang="de-AT"/>
           </a:p>
@@ -7819,7 +7880,7 @@
           <a:p>
             <a:fld id="{A283F6F3-EBD4-4A96-B1FC-B82E01871E33}" type="datetimeFigureOut">
               <a:rPr lang="de-AT" smtClean="0"/>
-              <a:t>19.01.2026</a:t>
+              <a:t>21.01.2026</a:t>
             </a:fld>
             <a:endParaRPr lang="de-AT"/>
           </a:p>
@@ -8087,7 +8148,7 @@
           <a:p>
             <a:fld id="{A283F6F3-EBD4-4A96-B1FC-B82E01871E33}" type="datetimeFigureOut">
               <a:rPr lang="de-AT" smtClean="0"/>
-              <a:t>19.01.2026</a:t>
+              <a:t>21.01.2026</a:t>
             </a:fld>
             <a:endParaRPr lang="de-AT"/>
           </a:p>
@@ -8502,7 +8563,7 @@
           <a:p>
             <a:fld id="{A283F6F3-EBD4-4A96-B1FC-B82E01871E33}" type="datetimeFigureOut">
               <a:rPr lang="de-AT" smtClean="0"/>
-              <a:t>19.01.2026</a:t>
+              <a:t>21.01.2026</a:t>
             </a:fld>
             <a:endParaRPr lang="de-AT"/>
           </a:p>
@@ -8644,7 +8705,7 @@
           <a:p>
             <a:fld id="{A283F6F3-EBD4-4A96-B1FC-B82E01871E33}" type="datetimeFigureOut">
               <a:rPr lang="de-AT" smtClean="0"/>
-              <a:t>19.01.2026</a:t>
+              <a:t>21.01.2026</a:t>
             </a:fld>
             <a:endParaRPr lang="de-AT"/>
           </a:p>
@@ -8757,7 +8818,7 @@
           <a:p>
             <a:fld id="{A283F6F3-EBD4-4A96-B1FC-B82E01871E33}" type="datetimeFigureOut">
               <a:rPr lang="de-AT" smtClean="0"/>
-              <a:t>19.01.2026</a:t>
+              <a:t>21.01.2026</a:t>
             </a:fld>
             <a:endParaRPr lang="de-AT"/>
           </a:p>
@@ -9070,7 +9131,7 @@
           <a:p>
             <a:fld id="{A283F6F3-EBD4-4A96-B1FC-B82E01871E33}" type="datetimeFigureOut">
               <a:rPr lang="de-AT" smtClean="0"/>
-              <a:t>19.01.2026</a:t>
+              <a:t>21.01.2026</a:t>
             </a:fld>
             <a:endParaRPr lang="de-AT"/>
           </a:p>
@@ -9359,7 +9420,7 @@
           <a:p>
             <a:fld id="{A283F6F3-EBD4-4A96-B1FC-B82E01871E33}" type="datetimeFigureOut">
               <a:rPr lang="de-AT" smtClean="0"/>
-              <a:t>19.01.2026</a:t>
+              <a:t>21.01.2026</a:t>
             </a:fld>
             <a:endParaRPr lang="de-AT"/>
           </a:p>
@@ -9602,7 +9663,7 @@
           <a:p>
             <a:fld id="{A283F6F3-EBD4-4A96-B1FC-B82E01871E33}" type="datetimeFigureOut">
               <a:rPr lang="de-AT" smtClean="0"/>
-              <a:t>19.01.2026</a:t>
+              <a:t>21.01.2026</a:t>
             </a:fld>
             <a:endParaRPr lang="de-AT"/>
           </a:p>
@@ -13476,10 +13537,6 @@
               <a:rPr lang="de-DE" sz="2800" b="1" dirty="0" err="1"/>
               <a:t>Checkout</a:t>
             </a:r>
-            <a:r>
-              <a:rPr lang="de-DE" sz="2800" b="1" dirty="0"/>
-              <a:t> nicht vollständig umgesetzt</a:t>
-            </a:r>
             <a:endParaRPr lang="de-DE" b="1" dirty="0"/>
           </a:p>
           <a:p>

--- a/Webshop_Berchtold/Endpräsentation_Webshop.pptx
+++ b/Webshop_Berchtold/Endpräsentation_Webshop.pptx
@@ -5,25 +5,23 @@
     <p:sldMasterId id="2147483648" r:id="rId1"/>
   </p:sldMasterIdLst>
   <p:notesMasterIdLst>
-    <p:notesMasterId r:id="rId18"/>
+    <p:notesMasterId r:id="rId16"/>
   </p:notesMasterIdLst>
   <p:sldIdLst>
     <p:sldId id="258" r:id="rId2"/>
     <p:sldId id="259" r:id="rId3"/>
     <p:sldId id="260" r:id="rId4"/>
-    <p:sldId id="271" r:id="rId5"/>
-    <p:sldId id="272" r:id="rId6"/>
-    <p:sldId id="280" r:id="rId7"/>
-    <p:sldId id="273" r:id="rId8"/>
-    <p:sldId id="274" r:id="rId9"/>
+    <p:sldId id="283" r:id="rId5"/>
+    <p:sldId id="280" r:id="rId6"/>
+    <p:sldId id="273" r:id="rId7"/>
+    <p:sldId id="274" r:id="rId8"/>
+    <p:sldId id="284" r:id="rId9"/>
     <p:sldId id="275" r:id="rId10"/>
-    <p:sldId id="263" r:id="rId11"/>
-    <p:sldId id="281" r:id="rId12"/>
-    <p:sldId id="276" r:id="rId13"/>
-    <p:sldId id="277" r:id="rId14"/>
-    <p:sldId id="282" r:id="rId15"/>
-    <p:sldId id="278" r:id="rId16"/>
-    <p:sldId id="279" r:id="rId17"/>
+    <p:sldId id="285" r:id="rId11"/>
+    <p:sldId id="263" r:id="rId12"/>
+    <p:sldId id="282" r:id="rId13"/>
+    <p:sldId id="278" r:id="rId14"/>
+    <p:sldId id="279" r:id="rId15"/>
   </p:sldIdLst>
   <p:sldSz cx="12192000" cy="6858000"/>
   <p:notesSz cx="6858000" cy="9144000"/>
@@ -130,16 +128,14 @@
             <p14:sldId id="258"/>
             <p14:sldId id="259"/>
             <p14:sldId id="260"/>
-            <p14:sldId id="271"/>
-            <p14:sldId id="272"/>
+            <p14:sldId id="283"/>
             <p14:sldId id="280"/>
             <p14:sldId id="273"/>
             <p14:sldId id="274"/>
+            <p14:sldId id="284"/>
             <p14:sldId id="275"/>
+            <p14:sldId id="285"/>
             <p14:sldId id="263"/>
-            <p14:sldId id="281"/>
-            <p14:sldId id="276"/>
-            <p14:sldId id="277"/>
             <p14:sldId id="282"/>
             <p14:sldId id="278"/>
             <p14:sldId id="279"/>
@@ -1712,7 +1708,7 @@
             </a:lnSpc>
           </a:pPr>
           <a:r>
-            <a:rPr lang="de-DE" dirty="0"/>
+            <a:rPr lang="de-AT" dirty="0"/>
             <a:t>Rückblick</a:t>
           </a:r>
           <a:endParaRPr lang="en-US" dirty="0"/>
@@ -1754,8 +1750,8 @@
             </a:lnSpc>
           </a:pPr>
           <a:r>
-            <a:rPr lang="de-DE" dirty="0"/>
-            <a:t>Ziele &amp; Zielerreichung</a:t>
+            <a:rPr lang="de-AT" dirty="0"/>
+            <a:t>Anforderungen und Ziele </a:t>
           </a:r>
           <a:endParaRPr lang="en-US" dirty="0"/>
         </a:p>
@@ -1796,12 +1792,8 @@
             </a:lnSpc>
           </a:pPr>
           <a:r>
-            <a:rPr lang="en-US" dirty="0" err="1"/>
-            <a:t>Herausforderungen</a:t>
-          </a:r>
-          <a:r>
             <a:rPr lang="en-US" dirty="0"/>
-            <a:t> &amp; Learnings </a:t>
+            <a:t>Live Demo</a:t>
           </a:r>
         </a:p>
       </dgm:t>
@@ -1841,8 +1833,8 @@
             </a:lnSpc>
           </a:pPr>
           <a:r>
-            <a:rPr lang="de-DE" dirty="0"/>
-            <a:t>Live Demo</a:t>
+            <a:rPr lang="de-AT" dirty="0"/>
+            <a:t>Projektergebnisse</a:t>
           </a:r>
           <a:endParaRPr lang="en-US" dirty="0"/>
         </a:p>
@@ -1870,7 +1862,7 @@
         </a:p>
       </dgm:t>
     </dgm:pt>
-    <dgm:pt modelId="{49260B99-4A13-4B17-ADD9-F36BAF7BDEA2}">
+    <dgm:pt modelId="{36B6500C-8578-4811-B206-945CF9CC746A}">
       <dgm:prSet/>
       <dgm:spPr/>
       <dgm:t>
@@ -1883,32 +1875,32 @@
             </a:lnSpc>
           </a:pPr>
           <a:r>
-            <a:rPr lang="de-DE" dirty="0"/>
+            <a:rPr lang="en-US" dirty="0" err="1"/>
             <a:t>Fazit</a:t>
           </a:r>
           <a:endParaRPr lang="en-US" dirty="0"/>
         </a:p>
       </dgm:t>
     </dgm:pt>
-    <dgm:pt modelId="{0268F5FA-6BEA-4C2D-9B0D-AE2BD0ADED10}" type="parTrans" cxnId="{30D5EFA4-BC2E-483F-8AA5-0961A4777EDB}">
+    <dgm:pt modelId="{29A2B291-FCAB-4865-BCE3-37322E7D2960}" type="parTrans" cxnId="{75CBC8D8-3820-46DF-B2EC-1D25CD29A561}">
       <dgm:prSet/>
       <dgm:spPr/>
       <dgm:t>
         <a:bodyPr/>
         <a:lstStyle/>
         <a:p>
-          <a:endParaRPr lang="en-US"/>
+          <a:endParaRPr lang="de-AT"/>
         </a:p>
       </dgm:t>
     </dgm:pt>
-    <dgm:pt modelId="{1F1804D0-F0D4-4E07-8CC7-0AD6B7F8DC81}" type="sibTrans" cxnId="{30D5EFA4-BC2E-483F-8AA5-0961A4777EDB}">
+    <dgm:pt modelId="{B40FB23F-6A8D-4936-A99E-2E490DBE4F00}" type="sibTrans" cxnId="{75CBC8D8-3820-46DF-B2EC-1D25CD29A561}">
       <dgm:prSet/>
       <dgm:spPr/>
       <dgm:t>
         <a:bodyPr/>
         <a:lstStyle/>
         <a:p>
-          <a:endParaRPr lang="en-US"/>
+          <a:endParaRPr lang="de-AT"/>
         </a:p>
       </dgm:t>
     </dgm:pt>
@@ -1933,13 +1925,13 @@
       <dgm:prSet presAssocID="{728A73D1-AD19-402A-9A87-A60C52125F98}" presName="iconRect" presStyleLbl="node1" presStyleIdx="0" presStyleCnt="5"/>
       <dgm:spPr>
         <a:blipFill>
-          <a:blip xmlns:r="http://schemas.openxmlformats.org/officeDocument/2006/relationships" r:embed="rId1">
+          <a:blip xmlns:r="http://schemas.openxmlformats.org/officeDocument/2006/relationships">
             <a:extLst>
               <a:ext uri="{28A0092B-C50C-407E-A947-70E740481C1C}">
                 <a14:useLocalDpi xmlns:a14="http://schemas.microsoft.com/office/drawing/2010/main" val="0"/>
               </a:ext>
               <a:ext uri="{96DAC541-7B7A-43D3-8B79-37D633B846F1}">
-                <asvg:svgBlip xmlns:asvg="http://schemas.microsoft.com/office/drawing/2016/SVG/main" r:embed="rId2"/>
+                <asvg:svgBlip xmlns:asvg="http://schemas.microsoft.com/office/drawing/2016/SVG/main" r:embed="rId1"/>
               </a:ext>
             </a:extLst>
           </a:blip>
@@ -1983,13 +1975,13 @@
       <dgm:prSet presAssocID="{1ADA2BD3-2895-42CA-AC30-ABFC3EFDC945}" presName="iconRect" presStyleLbl="node1" presStyleIdx="1" presStyleCnt="5"/>
       <dgm:spPr>
         <a:blipFill>
-          <a:blip xmlns:r="http://schemas.openxmlformats.org/officeDocument/2006/relationships" r:embed="rId3">
+          <a:blip xmlns:r="http://schemas.openxmlformats.org/officeDocument/2006/relationships">
             <a:extLst>
               <a:ext uri="{28A0092B-C50C-407E-A947-70E740481C1C}">
                 <a14:useLocalDpi xmlns:a14="http://schemas.microsoft.com/office/drawing/2010/main" val="0"/>
               </a:ext>
               <a:ext uri="{96DAC541-7B7A-43D3-8B79-37D633B846F1}">
-                <asvg:svgBlip xmlns:asvg="http://schemas.microsoft.com/office/drawing/2016/SVG/main" r:embed="rId4"/>
+                <asvg:svgBlip xmlns:asvg="http://schemas.microsoft.com/office/drawing/2016/SVG/main" r:embed="rId2"/>
               </a:ext>
             </a:extLst>
           </a:blip>
@@ -2032,8 +2024,14 @@
     <dgm:pt modelId="{738FBF5A-DC5C-4778-BD25-83F3629423F8}" type="pres">
       <dgm:prSet presAssocID="{277E0D86-93C4-4788-8D46-BD0AD291AB3D}" presName="iconRect" presStyleLbl="node1" presStyleIdx="2" presStyleCnt="5"/>
       <dgm:spPr>
-        <a:blipFill rotWithShape="1">
-          <a:blip xmlns:r="http://schemas.openxmlformats.org/officeDocument/2006/relationships" r:embed="rId5"/>
+        <a:blipFill>
+          <a:blip xmlns:r="http://schemas.openxmlformats.org/officeDocument/2006/relationships">
+            <a:extLst>
+              <a:ext uri="{96DAC541-7B7A-43D3-8B79-37D633B846F1}">
+                <asvg:svgBlip xmlns:asvg="http://schemas.microsoft.com/office/drawing/2016/SVG/main" r:embed="rId3"/>
+              </a:ext>
+            </a:extLst>
+          </a:blip>
           <a:srcRect/>
           <a:stretch>
             <a:fillRect/>
@@ -2042,7 +2040,7 @@
       </dgm:spPr>
       <dgm:extLst>
         <a:ext uri="{E40237B7-FDA0-4F09-8148-C483321AD2D9}">
-          <dgm14:cNvPr xmlns:dgm14="http://schemas.microsoft.com/office/drawing/2010/diagram" id="0" name="" descr="Warnung"/>
+          <dgm14:cNvPr xmlns:dgm14="http://schemas.microsoft.com/office/drawing/2010/diagram" id="0" name="" descr="Brainstorming Silhouette"/>
         </a:ext>
       </dgm:extLst>
     </dgm:pt>
@@ -2074,14 +2072,11 @@
     <dgm:pt modelId="{C353B3EC-88DE-4505-A754-6542BD0C4F53}" type="pres">
       <dgm:prSet presAssocID="{FF6EA48B-70D5-4A06-ADA7-0D3C8441C322}" presName="iconRect" presStyleLbl="node1" presStyleIdx="3" presStyleCnt="5"/>
       <dgm:spPr>
-        <a:blipFill rotWithShape="1">
-          <a:blip xmlns:r="http://schemas.openxmlformats.org/officeDocument/2006/relationships" r:embed="rId6">
+        <a:blipFill>
+          <a:blip xmlns:r="http://schemas.openxmlformats.org/officeDocument/2006/relationships">
             <a:extLst>
-              <a:ext uri="{28A0092B-C50C-407E-A947-70E740481C1C}">
-                <a14:useLocalDpi xmlns:a14="http://schemas.microsoft.com/office/drawing/2010/main" val="0"/>
-              </a:ext>
               <a:ext uri="{96DAC541-7B7A-43D3-8B79-37D633B846F1}">
-                <asvg:svgBlip xmlns:asvg="http://schemas.microsoft.com/office/drawing/2016/SVG/main" r:embed="rId7"/>
+                <asvg:svgBlip xmlns:asvg="http://schemas.microsoft.com/office/drawing/2016/SVG/main" r:embed="rId4"/>
               </a:ext>
             </a:extLst>
           </a:blip>
@@ -2093,7 +2088,7 @@
       </dgm:spPr>
       <dgm:extLst>
         <a:ext uri="{E40237B7-FDA0-4F09-8148-C483321AD2D9}">
-          <dgm14:cNvPr xmlns:dgm14="http://schemas.microsoft.com/office/drawing/2010/diagram" id="0" name="" descr="Monitor"/>
+          <dgm14:cNvPr xmlns:dgm14="http://schemas.microsoft.com/office/drawing/2010/diagram" id="0" name="" descr="Monitor mit einfarbiger Füllung"/>
         </a:ext>
       </dgm:extLst>
     </dgm:pt>
@@ -2110,32 +2105,30 @@
       </dgm:prSet>
       <dgm:spPr/>
     </dgm:pt>
-    <dgm:pt modelId="{6A8A53BB-CCBA-4F60-9336-5F17BD83AC36}" type="pres">
+    <dgm:pt modelId="{975406FB-0E29-4002-ABEF-84486491B715}" type="pres">
       <dgm:prSet presAssocID="{D5E04BDF-8D8D-4D05-A783-44F8A643D01A}" presName="sibTrans" presStyleCnt="0"/>
       <dgm:spPr/>
     </dgm:pt>
-    <dgm:pt modelId="{6D2FB591-B6A6-4509-80A1-7D82FF9FC0A3}" type="pres">
-      <dgm:prSet presAssocID="{49260B99-4A13-4B17-ADD9-F36BAF7BDEA2}" presName="compNode" presStyleCnt="0"/>
+    <dgm:pt modelId="{CB3FC95F-A72B-488B-9FD3-D4A18A8E007E}" type="pres">
+      <dgm:prSet presAssocID="{36B6500C-8578-4811-B206-945CF9CC746A}" presName="compNode" presStyleCnt="0"/>
       <dgm:spPr/>
     </dgm:pt>
-    <dgm:pt modelId="{7BFEE4F8-62EF-400A-A72C-B6729D592F55}" type="pres">
-      <dgm:prSet presAssocID="{49260B99-4A13-4B17-ADD9-F36BAF7BDEA2}" presName="bgRect" presStyleLbl="bgShp" presStyleIdx="4" presStyleCnt="5"/>
+    <dgm:pt modelId="{8B54DA96-B9DD-475F-BF01-9CB4F0CC4D2D}" type="pres">
+      <dgm:prSet presAssocID="{36B6500C-8578-4811-B206-945CF9CC746A}" presName="bgRect" presStyleLbl="bgShp" presStyleIdx="4" presStyleCnt="5"/>
       <dgm:spPr/>
     </dgm:pt>
-    <dgm:pt modelId="{2A52C70D-B364-4621-B707-66F5833E80F3}" type="pres">
-      <dgm:prSet presAssocID="{49260B99-4A13-4B17-ADD9-F36BAF7BDEA2}" presName="iconRect" presStyleLbl="node1" presStyleIdx="4" presStyleCnt="5"/>
+    <dgm:pt modelId="{8ADD9AEB-A6BA-4F66-A55F-7DB4AEE1E15C}" type="pres">
+      <dgm:prSet presAssocID="{36B6500C-8578-4811-B206-945CF9CC746A}" presName="iconRect" presStyleLbl="node1" presStyleIdx="4" presStyleCnt="5"/>
       <dgm:spPr>
         <a:blipFill>
-          <a:blip xmlns:r="http://schemas.openxmlformats.org/officeDocument/2006/relationships" r:embed="rId8">
+          <a:blip xmlns:r="http://schemas.openxmlformats.org/officeDocument/2006/relationships">
             <a:extLst>
-              <a:ext uri="{28A0092B-C50C-407E-A947-70E740481C1C}">
-                <a14:useLocalDpi xmlns:a14="http://schemas.microsoft.com/office/drawing/2010/main" val="0"/>
-              </a:ext>
               <a:ext uri="{96DAC541-7B7A-43D3-8B79-37D633B846F1}">
-                <asvg:svgBlip xmlns:asvg="http://schemas.microsoft.com/office/drawing/2016/SVG/main" r:embed="rId9"/>
+                <asvg:svgBlip xmlns:asvg="http://schemas.microsoft.com/office/drawing/2016/SVG/main" r:embed="rId5"/>
               </a:ext>
             </a:extLst>
           </a:blip>
+          <a:srcRect/>
           <a:stretch>
             <a:fillRect/>
           </a:stretch>
@@ -2143,16 +2136,16 @@
       </dgm:spPr>
       <dgm:extLst>
         <a:ext uri="{E40237B7-FDA0-4F09-8148-C483321AD2D9}">
-          <dgm14:cNvPr xmlns:dgm14="http://schemas.microsoft.com/office/drawing/2010/diagram" id="0" name="" descr="Auge"/>
+          <dgm14:cNvPr xmlns:dgm14="http://schemas.microsoft.com/office/drawing/2010/diagram" id="0" name="" descr="Auge mit einfarbiger Füllung"/>
         </a:ext>
       </dgm:extLst>
     </dgm:pt>
-    <dgm:pt modelId="{EC0492C9-C187-49E4-9A2E-BBF241E7ACC0}" type="pres">
-      <dgm:prSet presAssocID="{49260B99-4A13-4B17-ADD9-F36BAF7BDEA2}" presName="spaceRect" presStyleCnt="0"/>
+    <dgm:pt modelId="{53FAE40A-5E04-4C49-9999-AB9CDEF7347D}" type="pres">
+      <dgm:prSet presAssocID="{36B6500C-8578-4811-B206-945CF9CC746A}" presName="spaceRect" presStyleCnt="0"/>
       <dgm:spPr/>
     </dgm:pt>
-    <dgm:pt modelId="{48EFED12-8EB6-4008-988B-8EEEE2A348B3}" type="pres">
-      <dgm:prSet presAssocID="{49260B99-4A13-4B17-ADD9-F36BAF7BDEA2}" presName="parTx" presStyleLbl="revTx" presStyleIdx="4" presStyleCnt="5">
+    <dgm:pt modelId="{5243EA4B-C144-469C-966E-3B207B4FD6DF}" type="pres">
+      <dgm:prSet presAssocID="{36B6500C-8578-4811-B206-945CF9CC746A}" presName="parTx" presStyleLbl="revTx" presStyleIdx="4" presStyleCnt="5">
         <dgm:presLayoutVars>
           <dgm:chMax val="0"/>
           <dgm:chPref val="0"/>
@@ -2162,17 +2155,17 @@
     </dgm:pt>
   </dgm:ptLst>
   <dgm:cxnLst>
+    <dgm:cxn modelId="{FEDB716A-6D58-4AF5-8EF9-B2C69208006F}" type="presOf" srcId="{36B6500C-8578-4811-B206-945CF9CC746A}" destId="{5243EA4B-C144-469C-966E-3B207B4FD6DF}" srcOrd="0" destOrd="0" presId="urn:microsoft.com/office/officeart/2018/2/layout/IconVerticalSolidList"/>
     <dgm:cxn modelId="{6015D94B-C7F2-4B06-B096-E7CCD928E405}" srcId="{601149C1-CFD3-4BDE-9D10-02604268D43E}" destId="{1ADA2BD3-2895-42CA-AC30-ABFC3EFDC945}" srcOrd="1" destOrd="0" parTransId="{93E1869B-37AD-4D68-BBC5-73A279DC3DB0}" sibTransId="{626E2F73-9BD7-4EC1-A838-31EF0F243F87}"/>
     <dgm:cxn modelId="{0D21844D-7847-4966-8CAF-A66323423FC9}" type="presOf" srcId="{728A73D1-AD19-402A-9A87-A60C52125F98}" destId="{E4A515B2-3268-48C3-87A0-95A36BCD3448}" srcOrd="0" destOrd="0" presId="urn:microsoft.com/office/officeart/2018/2/layout/IconVerticalSolidList"/>
     <dgm:cxn modelId="{2EC4C550-8EB0-4E77-9E3C-DF52EB1FD2F2}" srcId="{601149C1-CFD3-4BDE-9D10-02604268D43E}" destId="{728A73D1-AD19-402A-9A87-A60C52125F98}" srcOrd="0" destOrd="0" parTransId="{BD0A2743-E90D-43C9-A4C0-A84B706B744B}" sibTransId="{67CB4D47-D9F7-4597-9D23-3114CC17D568}"/>
     <dgm:cxn modelId="{FAF17B52-D2C0-4D12-8030-36745EA09CA3}" srcId="{601149C1-CFD3-4BDE-9D10-02604268D43E}" destId="{277E0D86-93C4-4788-8D46-BD0AD291AB3D}" srcOrd="2" destOrd="0" parTransId="{D008D7B5-E6E6-4F7F-937F-F6EDFB6BD715}" sibTransId="{0CC8A3EA-E66E-4BB3-A30A-EA5C6B9CF79D}"/>
     <dgm:cxn modelId="{FF206076-FEEA-4772-B56F-8ADAED5BA09A}" type="presOf" srcId="{601149C1-CFD3-4BDE-9D10-02604268D43E}" destId="{2B2C1B6B-0323-439B-B6E9-F430445964CB}" srcOrd="0" destOrd="0" presId="urn:microsoft.com/office/officeart/2018/2/layout/IconVerticalSolidList"/>
-    <dgm:cxn modelId="{30D5EFA4-BC2E-483F-8AA5-0961A4777EDB}" srcId="{601149C1-CFD3-4BDE-9D10-02604268D43E}" destId="{49260B99-4A13-4B17-ADD9-F36BAF7BDEA2}" srcOrd="4" destOrd="0" parTransId="{0268F5FA-6BEA-4C2D-9B0D-AE2BD0ADED10}" sibTransId="{1F1804D0-F0D4-4E07-8CC7-0AD6B7F8DC81}"/>
     <dgm:cxn modelId="{790C34A5-DF6A-4F5E-ACB5-6A794CECD7DB}" type="presOf" srcId="{1ADA2BD3-2895-42CA-AC30-ABFC3EFDC945}" destId="{B3C5D237-A6BE-4F20-A02E-FFB882236D87}" srcOrd="0" destOrd="0" presId="urn:microsoft.com/office/officeart/2018/2/layout/IconVerticalSolidList"/>
     <dgm:cxn modelId="{4EF0C7D6-E213-4018-BE80-F48AC19FDB93}" srcId="{601149C1-CFD3-4BDE-9D10-02604268D43E}" destId="{FF6EA48B-70D5-4A06-ADA7-0D3C8441C322}" srcOrd="3" destOrd="0" parTransId="{90FFC0EC-52CF-4063-91CD-E6A434F70611}" sibTransId="{D5E04BDF-8D8D-4D05-A783-44F8A643D01A}"/>
+    <dgm:cxn modelId="{75CBC8D8-3820-46DF-B2EC-1D25CD29A561}" srcId="{601149C1-CFD3-4BDE-9D10-02604268D43E}" destId="{36B6500C-8578-4811-B206-945CF9CC746A}" srcOrd="4" destOrd="0" parTransId="{29A2B291-FCAB-4865-BCE3-37322E7D2960}" sibTransId="{B40FB23F-6A8D-4936-A99E-2E490DBE4F00}"/>
     <dgm:cxn modelId="{0BA905DB-B62B-4180-BDB6-495E5E960AA9}" type="presOf" srcId="{277E0D86-93C4-4788-8D46-BD0AD291AB3D}" destId="{46BB7B6D-5B38-4767-BE35-AFB35682DE54}" srcOrd="0" destOrd="0" presId="urn:microsoft.com/office/officeart/2018/2/layout/IconVerticalSolidList"/>
     <dgm:cxn modelId="{3997E1E5-88C0-4A26-9E93-BA886C0C12D1}" type="presOf" srcId="{FF6EA48B-70D5-4A06-ADA7-0D3C8441C322}" destId="{19BF776B-4D94-47D1-A8EA-4C72E2447E69}" srcOrd="0" destOrd="0" presId="urn:microsoft.com/office/officeart/2018/2/layout/IconVerticalSolidList"/>
-    <dgm:cxn modelId="{4B8BBEE7-BC76-4DC4-A1E2-94BD728BBBA4}" type="presOf" srcId="{49260B99-4A13-4B17-ADD9-F36BAF7BDEA2}" destId="{48EFED12-8EB6-4008-988B-8EEEE2A348B3}" srcOrd="0" destOrd="0" presId="urn:microsoft.com/office/officeart/2018/2/layout/IconVerticalSolidList"/>
     <dgm:cxn modelId="{710E2E7C-4FA3-4E6C-B4CE-63B4C284162F}" type="presParOf" srcId="{2B2C1B6B-0323-439B-B6E9-F430445964CB}" destId="{39639DAE-57AE-47FA-81A0-259B8577772D}" srcOrd="0" destOrd="0" presId="urn:microsoft.com/office/officeart/2018/2/layout/IconVerticalSolidList"/>
     <dgm:cxn modelId="{C96BB45C-8D7B-4F27-B164-0F2B2F75715C}" type="presParOf" srcId="{39639DAE-57AE-47FA-81A0-259B8577772D}" destId="{2A59D14B-8B7F-4E99-ADBA-795F2B0209F3}" srcOrd="0" destOrd="0" presId="urn:microsoft.com/office/officeart/2018/2/layout/IconVerticalSolidList"/>
     <dgm:cxn modelId="{D4D09888-0456-458F-B24A-71BFD1738914}" type="presParOf" srcId="{39639DAE-57AE-47FA-81A0-259B8577772D}" destId="{E8B130CA-0AFA-4234-8BE1-66B0B0D1AE54}" srcOrd="1" destOrd="0" presId="urn:microsoft.com/office/officeart/2018/2/layout/IconVerticalSolidList"/>
@@ -2196,12 +2189,12 @@
     <dgm:cxn modelId="{7A9E60FE-BDBF-411A-BFC2-49A3EEF68E78}" type="presParOf" srcId="{BE51A623-F34F-47EC-BCA8-72E942089D41}" destId="{C353B3EC-88DE-4505-A754-6542BD0C4F53}" srcOrd="1" destOrd="0" presId="urn:microsoft.com/office/officeart/2018/2/layout/IconVerticalSolidList"/>
     <dgm:cxn modelId="{64936390-0107-46F7-A456-16EC2C99C4FB}" type="presParOf" srcId="{BE51A623-F34F-47EC-BCA8-72E942089D41}" destId="{40F6BBF7-28AE-4E9D-AFF4-849522F48D9B}" srcOrd="2" destOrd="0" presId="urn:microsoft.com/office/officeart/2018/2/layout/IconVerticalSolidList"/>
     <dgm:cxn modelId="{80D9D9D5-C7FF-415E-9ABD-36B56CD4AD6D}" type="presParOf" srcId="{BE51A623-F34F-47EC-BCA8-72E942089D41}" destId="{19BF776B-4D94-47D1-A8EA-4C72E2447E69}" srcOrd="3" destOrd="0" presId="urn:microsoft.com/office/officeart/2018/2/layout/IconVerticalSolidList"/>
-    <dgm:cxn modelId="{D0D9C60E-1F9C-44E0-8C82-FF675D082FE4}" type="presParOf" srcId="{2B2C1B6B-0323-439B-B6E9-F430445964CB}" destId="{6A8A53BB-CCBA-4F60-9336-5F17BD83AC36}" srcOrd="7" destOrd="0" presId="urn:microsoft.com/office/officeart/2018/2/layout/IconVerticalSolidList"/>
-    <dgm:cxn modelId="{718327FA-D177-4CE8-A82F-8F3CB0E9E9B8}" type="presParOf" srcId="{2B2C1B6B-0323-439B-B6E9-F430445964CB}" destId="{6D2FB591-B6A6-4509-80A1-7D82FF9FC0A3}" srcOrd="8" destOrd="0" presId="urn:microsoft.com/office/officeart/2018/2/layout/IconVerticalSolidList"/>
-    <dgm:cxn modelId="{6F079201-280E-4ED3-83E7-2D88BD11CCE9}" type="presParOf" srcId="{6D2FB591-B6A6-4509-80A1-7D82FF9FC0A3}" destId="{7BFEE4F8-62EF-400A-A72C-B6729D592F55}" srcOrd="0" destOrd="0" presId="urn:microsoft.com/office/officeart/2018/2/layout/IconVerticalSolidList"/>
-    <dgm:cxn modelId="{5FDF8C79-2D38-4D71-8B0C-45CB024169D4}" type="presParOf" srcId="{6D2FB591-B6A6-4509-80A1-7D82FF9FC0A3}" destId="{2A52C70D-B364-4621-B707-66F5833E80F3}" srcOrd="1" destOrd="0" presId="urn:microsoft.com/office/officeart/2018/2/layout/IconVerticalSolidList"/>
-    <dgm:cxn modelId="{4E7EECBC-8BEB-4D6F-B27F-22189CCAF236}" type="presParOf" srcId="{6D2FB591-B6A6-4509-80A1-7D82FF9FC0A3}" destId="{EC0492C9-C187-49E4-9A2E-BBF241E7ACC0}" srcOrd="2" destOrd="0" presId="urn:microsoft.com/office/officeart/2018/2/layout/IconVerticalSolidList"/>
-    <dgm:cxn modelId="{20C3F39B-1B54-4573-A54A-7580CBA53156}" type="presParOf" srcId="{6D2FB591-B6A6-4509-80A1-7D82FF9FC0A3}" destId="{48EFED12-8EB6-4008-988B-8EEEE2A348B3}" srcOrd="3" destOrd="0" presId="urn:microsoft.com/office/officeart/2018/2/layout/IconVerticalSolidList"/>
+    <dgm:cxn modelId="{FDA3F3EB-1F79-46C8-99D8-AEB73B2DFDBF}" type="presParOf" srcId="{2B2C1B6B-0323-439B-B6E9-F430445964CB}" destId="{975406FB-0E29-4002-ABEF-84486491B715}" srcOrd="7" destOrd="0" presId="urn:microsoft.com/office/officeart/2018/2/layout/IconVerticalSolidList"/>
+    <dgm:cxn modelId="{4371FB7A-E788-481A-9BCF-8CBD4392413A}" type="presParOf" srcId="{2B2C1B6B-0323-439B-B6E9-F430445964CB}" destId="{CB3FC95F-A72B-488B-9FD3-D4A18A8E007E}" srcOrd="8" destOrd="0" presId="urn:microsoft.com/office/officeart/2018/2/layout/IconVerticalSolidList"/>
+    <dgm:cxn modelId="{83219574-5BBC-41DA-A013-695802519163}" type="presParOf" srcId="{CB3FC95F-A72B-488B-9FD3-D4A18A8E007E}" destId="{8B54DA96-B9DD-475F-BF01-9CB4F0CC4D2D}" srcOrd="0" destOrd="0" presId="urn:microsoft.com/office/officeart/2018/2/layout/IconVerticalSolidList"/>
+    <dgm:cxn modelId="{30348887-5B3A-43B3-B641-328E19F86C56}" type="presParOf" srcId="{CB3FC95F-A72B-488B-9FD3-D4A18A8E007E}" destId="{8ADD9AEB-A6BA-4F66-A55F-7DB4AEE1E15C}" srcOrd="1" destOrd="0" presId="urn:microsoft.com/office/officeart/2018/2/layout/IconVerticalSolidList"/>
+    <dgm:cxn modelId="{A09201D8-6285-4833-9444-437E82BFAA7A}" type="presParOf" srcId="{CB3FC95F-A72B-488B-9FD3-D4A18A8E007E}" destId="{53FAE40A-5E04-4C49-9999-AB9CDEF7347D}" srcOrd="2" destOrd="0" presId="urn:microsoft.com/office/officeart/2018/2/layout/IconVerticalSolidList"/>
+    <dgm:cxn modelId="{0933F64E-791C-4BC9-AC70-D4E00285A8B9}" type="presParOf" srcId="{CB3FC95F-A72B-488B-9FD3-D4A18A8E007E}" destId="{5243EA4B-C144-469C-966E-3B207B4FD6DF}" srcOrd="3" destOrd="0" presId="urn:microsoft.com/office/officeart/2018/2/layout/IconVerticalSolidList"/>
   </dgm:cxnLst>
   <dgm:bg/>
   <dgm:whole/>
@@ -2373,13 +2366,13 @@
       <dgm:prSet presAssocID="{1FF00A57-8F83-4CCC-9B3E-B253268D0877}" presName="iconRect" presStyleLbl="node1" presStyleIdx="0" presStyleCnt="3"/>
       <dgm:spPr>
         <a:blipFill>
-          <a:blip xmlns:r="http://schemas.openxmlformats.org/officeDocument/2006/relationships" r:embed="rId1">
+          <a:blip xmlns:r="http://schemas.openxmlformats.org/officeDocument/2006/relationships">
             <a:extLst>
               <a:ext uri="{28A0092B-C50C-407E-A947-70E740481C1C}">
                 <a14:useLocalDpi xmlns:a14="http://schemas.microsoft.com/office/drawing/2010/main" val="0"/>
               </a:ext>
               <a:ext uri="{96DAC541-7B7A-43D3-8B79-37D633B846F1}">
-                <asvg:svgBlip xmlns:asvg="http://schemas.microsoft.com/office/drawing/2016/SVG/main" r:embed="rId2"/>
+                <asvg:svgBlip xmlns:asvg="http://schemas.microsoft.com/office/drawing/2016/SVG/main" r:embed="rId1"/>
               </a:ext>
             </a:extLst>
           </a:blip>
@@ -2423,13 +2416,13 @@
       <dgm:prSet presAssocID="{9F4B455E-DF7D-4667-A2A1-F31A31D453E7}" presName="iconRect" presStyleLbl="node1" presStyleIdx="1" presStyleCnt="3"/>
       <dgm:spPr>
         <a:blipFill>
-          <a:blip xmlns:r="http://schemas.openxmlformats.org/officeDocument/2006/relationships" r:embed="rId3">
+          <a:blip xmlns:r="http://schemas.openxmlformats.org/officeDocument/2006/relationships">
             <a:extLst>
               <a:ext uri="{28A0092B-C50C-407E-A947-70E740481C1C}">
                 <a14:useLocalDpi xmlns:a14="http://schemas.microsoft.com/office/drawing/2010/main" val="0"/>
               </a:ext>
               <a:ext uri="{96DAC541-7B7A-43D3-8B79-37D633B846F1}">
-                <asvg:svgBlip xmlns:asvg="http://schemas.microsoft.com/office/drawing/2016/SVG/main" r:embed="rId4"/>
+                <asvg:svgBlip xmlns:asvg="http://schemas.microsoft.com/office/drawing/2016/SVG/main" r:embed="rId2"/>
               </a:ext>
             </a:extLst>
           </a:blip>
@@ -2473,10 +2466,10 @@
       <dgm:prSet presAssocID="{0E29D4EF-A949-46DC-B9D6-EDE3F482AD21}" presName="iconRect" presStyleLbl="node1" presStyleIdx="2" presStyleCnt="3"/>
       <dgm:spPr>
         <a:blipFill>
-          <a:blip xmlns:r="http://schemas.openxmlformats.org/officeDocument/2006/relationships" r:embed="rId5">
+          <a:blip xmlns:r="http://schemas.openxmlformats.org/officeDocument/2006/relationships">
             <a:extLst>
               <a:ext uri="{96DAC541-7B7A-43D3-8B79-37D633B846F1}">
-                <asvg:svgBlip xmlns:asvg="http://schemas.microsoft.com/office/drawing/2016/SVG/main" r:embed="rId6"/>
+                <asvg:svgBlip xmlns:asvg="http://schemas.microsoft.com/office/drawing/2016/SVG/main" r:embed="rId3"/>
               </a:ext>
             </a:extLst>
           </a:blip>
@@ -2606,13 +2599,13 @@
           <a:avLst/>
         </a:prstGeom>
         <a:blipFill>
-          <a:blip xmlns:r="http://schemas.openxmlformats.org/officeDocument/2006/relationships" r:embed="rId1">
+          <a:blip xmlns:r="http://schemas.openxmlformats.org/officeDocument/2006/relationships">
             <a:extLst>
               <a:ext uri="{28A0092B-C50C-407E-A947-70E740481C1C}">
                 <a14:useLocalDpi xmlns:a14="http://schemas.microsoft.com/office/drawing/2010/main" val="0"/>
               </a:ext>
               <a:ext uri="{96DAC541-7B7A-43D3-8B79-37D633B846F1}">
-                <asvg:svgBlip xmlns:asvg="http://schemas.microsoft.com/office/drawing/2016/SVG/main" r:embed="rId2"/>
+                <asvg:svgBlip xmlns:asvg="http://schemas.microsoft.com/office/drawing/2016/SVG/main" r:embed="rId1"/>
               </a:ext>
             </a:extLst>
           </a:blip>
@@ -2699,7 +2692,7 @@
             <a:buNone/>
           </a:pPr>
           <a:r>
-            <a:rPr lang="de-DE" sz="1900" kern="1200" dirty="0"/>
+            <a:rPr lang="de-AT" sz="1900" kern="1200" dirty="0"/>
             <a:t>Rückblick</a:t>
           </a:r>
           <a:endParaRPr lang="en-US" sz="1900" kern="1200" dirty="0"/>
@@ -2766,13 +2759,13 @@
           <a:avLst/>
         </a:prstGeom>
         <a:blipFill>
-          <a:blip xmlns:r="http://schemas.openxmlformats.org/officeDocument/2006/relationships" r:embed="rId3">
+          <a:blip xmlns:r="http://schemas.openxmlformats.org/officeDocument/2006/relationships">
             <a:extLst>
               <a:ext uri="{28A0092B-C50C-407E-A947-70E740481C1C}">
                 <a14:useLocalDpi xmlns:a14="http://schemas.microsoft.com/office/drawing/2010/main" val="0"/>
               </a:ext>
               <a:ext uri="{96DAC541-7B7A-43D3-8B79-37D633B846F1}">
-                <asvg:svgBlip xmlns:asvg="http://schemas.microsoft.com/office/drawing/2016/SVG/main" r:embed="rId4"/>
+                <asvg:svgBlip xmlns:asvg="http://schemas.microsoft.com/office/drawing/2016/SVG/main" r:embed="rId2"/>
               </a:ext>
             </a:extLst>
           </a:blip>
@@ -2859,8 +2852,8 @@
             <a:buNone/>
           </a:pPr>
           <a:r>
-            <a:rPr lang="de-DE" sz="1900" kern="1200" dirty="0"/>
-            <a:t>Ziele &amp; Zielerreichung</a:t>
+            <a:rPr lang="de-AT" sz="1900" kern="1200" dirty="0"/>
+            <a:t>Anforderungen und Ziele </a:t>
           </a:r>
           <a:endParaRPr lang="en-US" sz="1900" kern="1200" dirty="0"/>
         </a:p>
@@ -2925,8 +2918,14 @@
         <a:prstGeom prst="rect">
           <a:avLst/>
         </a:prstGeom>
-        <a:blipFill rotWithShape="1">
-          <a:blip xmlns:r="http://schemas.openxmlformats.org/officeDocument/2006/relationships" r:embed="rId5"/>
+        <a:blipFill>
+          <a:blip xmlns:r="http://schemas.openxmlformats.org/officeDocument/2006/relationships">
+            <a:extLst>
+              <a:ext uri="{96DAC541-7B7A-43D3-8B79-37D633B846F1}">
+                <asvg:svgBlip xmlns:asvg="http://schemas.microsoft.com/office/drawing/2016/SVG/main" r:embed="rId3"/>
+              </a:ext>
+            </a:extLst>
+          </a:blip>
           <a:srcRect/>
           <a:stretch>
             <a:fillRect/>
@@ -3011,8 +3010,8 @@
             <a:buNone/>
           </a:pPr>
           <a:r>
-            <a:rPr lang="de-DE" sz="1900" kern="1200" dirty="0"/>
-            <a:t>Live Demo</a:t>
+            <a:rPr lang="de-AT" sz="1900" kern="1200" dirty="0"/>
+            <a:t>Projektergebnisse</a:t>
           </a:r>
           <a:endParaRPr lang="en-US" sz="1900" kern="1200" dirty="0"/>
         </a:p>
@@ -3077,14 +3076,11 @@
         <a:prstGeom prst="rect">
           <a:avLst/>
         </a:prstGeom>
-        <a:blipFill rotWithShape="1">
-          <a:blip xmlns:r="http://schemas.openxmlformats.org/officeDocument/2006/relationships" r:embed="rId6">
+        <a:blipFill>
+          <a:blip xmlns:r="http://schemas.openxmlformats.org/officeDocument/2006/relationships">
             <a:extLst>
-              <a:ext uri="{28A0092B-C50C-407E-A947-70E740481C1C}">
-                <a14:useLocalDpi xmlns:a14="http://schemas.microsoft.com/office/drawing/2010/main" val="0"/>
-              </a:ext>
               <a:ext uri="{96DAC541-7B7A-43D3-8B79-37D633B846F1}">
-                <asvg:svgBlip xmlns:asvg="http://schemas.microsoft.com/office/drawing/2016/SVG/main" r:embed="rId7"/>
+                <asvg:svgBlip xmlns:asvg="http://schemas.microsoft.com/office/drawing/2016/SVG/main" r:embed="rId4"/>
               </a:ext>
             </a:extLst>
           </a:blip>
@@ -3172,12 +3168,8 @@
             <a:buNone/>
           </a:pPr>
           <a:r>
-            <a:rPr lang="en-US" sz="1900" kern="1200" dirty="0" err="1"/>
-            <a:t>Herausforderungen</a:t>
-          </a:r>
-          <a:r>
             <a:rPr lang="en-US" sz="1900" kern="1200" dirty="0"/>
-            <a:t> &amp; Learnings </a:t>
+            <a:t>Live Demo</a:t>
           </a:r>
         </a:p>
       </dsp:txBody>
@@ -3186,7 +3178,7 @@
         <a:ext cx="9679276" cy="724089"/>
       </dsp:txXfrm>
     </dsp:sp>
-    <dsp:sp modelId="{7BFEE4F8-62EF-400A-A72C-B6729D592F55}">
+    <dsp:sp modelId="{8B54DA96-B9DD-475F-BF01-9CB4F0CC4D2D}">
       <dsp:nvSpPr>
         <dsp:cNvPr id="0" name=""/>
         <dsp:cNvSpPr/>
@@ -3228,7 +3220,7 @@
         <a:fontRef idx="minor"/>
       </dsp:style>
     </dsp:sp>
-    <dsp:sp modelId="{2A52C70D-B364-4621-B707-66F5833E80F3}">
+    <dsp:sp modelId="{8ADD9AEB-A6BA-4F66-A55F-7DB4AEE1E15C}">
       <dsp:nvSpPr>
         <dsp:cNvPr id="0" name=""/>
         <dsp:cNvSpPr/>
@@ -3242,16 +3234,14 @@
           <a:avLst/>
         </a:prstGeom>
         <a:blipFill>
-          <a:blip xmlns:r="http://schemas.openxmlformats.org/officeDocument/2006/relationships" r:embed="rId8">
+          <a:blip xmlns:r="http://schemas.openxmlformats.org/officeDocument/2006/relationships">
             <a:extLst>
-              <a:ext uri="{28A0092B-C50C-407E-A947-70E740481C1C}">
-                <a14:useLocalDpi xmlns:a14="http://schemas.microsoft.com/office/drawing/2010/main" val="0"/>
-              </a:ext>
               <a:ext uri="{96DAC541-7B7A-43D3-8B79-37D633B846F1}">
-                <asvg:svgBlip xmlns:asvg="http://schemas.microsoft.com/office/drawing/2016/SVG/main" r:embed="rId9"/>
+                <asvg:svgBlip xmlns:asvg="http://schemas.microsoft.com/office/drawing/2016/SVG/main" r:embed="rId5"/>
               </a:ext>
             </a:extLst>
           </a:blip>
+          <a:srcRect/>
           <a:stretch>
             <a:fillRect/>
           </a:stretch>
@@ -3285,7 +3275,7 @@
         </a:fontRef>
       </dsp:style>
     </dsp:sp>
-    <dsp:sp modelId="{48EFED12-8EB6-4008-988B-8EEEE2A348B3}">
+    <dsp:sp modelId="{5243EA4B-C144-469C-966E-3B207B4FD6DF}">
       <dsp:nvSpPr>
         <dsp:cNvPr id="0" name=""/>
         <dsp:cNvSpPr/>
@@ -3335,7 +3325,7 @@
             <a:buNone/>
           </a:pPr>
           <a:r>
-            <a:rPr lang="de-DE" sz="1900" kern="1200" dirty="0"/>
+            <a:rPr lang="en-US" sz="1900" kern="1200" dirty="0" err="1"/>
             <a:t>Fazit</a:t>
           </a:r>
           <a:endParaRPr lang="en-US" sz="1900" kern="1200" dirty="0"/>
@@ -3414,13 +3404,13 @@
           <a:avLst/>
         </a:prstGeom>
         <a:blipFill>
-          <a:blip xmlns:r="http://schemas.openxmlformats.org/officeDocument/2006/relationships" r:embed="rId1">
+          <a:blip xmlns:r="http://schemas.openxmlformats.org/officeDocument/2006/relationships">
             <a:extLst>
               <a:ext uri="{28A0092B-C50C-407E-A947-70E740481C1C}">
                 <a14:useLocalDpi xmlns:a14="http://schemas.microsoft.com/office/drawing/2010/main" val="0"/>
               </a:ext>
               <a:ext uri="{96DAC541-7B7A-43D3-8B79-37D633B846F1}">
-                <asvg:svgBlip xmlns:asvg="http://schemas.microsoft.com/office/drawing/2016/SVG/main" r:embed="rId2"/>
+                <asvg:svgBlip xmlns:asvg="http://schemas.microsoft.com/office/drawing/2016/SVG/main" r:embed="rId1"/>
               </a:ext>
             </a:extLst>
           </a:blip>
@@ -3574,13 +3564,13 @@
           <a:avLst/>
         </a:prstGeom>
         <a:blipFill>
-          <a:blip xmlns:r="http://schemas.openxmlformats.org/officeDocument/2006/relationships" r:embed="rId3">
+          <a:blip xmlns:r="http://schemas.openxmlformats.org/officeDocument/2006/relationships">
             <a:extLst>
               <a:ext uri="{28A0092B-C50C-407E-A947-70E740481C1C}">
                 <a14:useLocalDpi xmlns:a14="http://schemas.microsoft.com/office/drawing/2010/main" val="0"/>
               </a:ext>
               <a:ext uri="{96DAC541-7B7A-43D3-8B79-37D633B846F1}">
-                <asvg:svgBlip xmlns:asvg="http://schemas.microsoft.com/office/drawing/2016/SVG/main" r:embed="rId4"/>
+                <asvg:svgBlip xmlns:asvg="http://schemas.microsoft.com/office/drawing/2016/SVG/main" r:embed="rId2"/>
               </a:ext>
             </a:extLst>
           </a:blip>
@@ -3734,10 +3724,10 @@
           <a:avLst/>
         </a:prstGeom>
         <a:blipFill>
-          <a:blip xmlns:r="http://schemas.openxmlformats.org/officeDocument/2006/relationships" r:embed="rId5">
+          <a:blip xmlns:r="http://schemas.openxmlformats.org/officeDocument/2006/relationships">
             <a:extLst>
               <a:ext uri="{96DAC541-7B7A-43D3-8B79-37D633B846F1}">
-                <asvg:svgBlip xmlns:asvg="http://schemas.microsoft.com/office/drawing/2016/SVG/main" r:embed="rId6"/>
+                <asvg:svgBlip xmlns:asvg="http://schemas.microsoft.com/office/drawing/2016/SVG/main" r:embed="rId3"/>
               </a:ext>
             </a:extLst>
           </a:blip>
@@ -6577,7 +6567,7 @@
           <a:p>
             <a:fld id="{A87E9BDD-2EC8-4FC5-8506-23DBD186366C}" type="datetimeFigureOut">
               <a:rPr lang="de-AT" smtClean="0"/>
-              <a:t>21.01.2026</a:t>
+              <a:t>13.04.2026</a:t>
             </a:fld>
             <a:endParaRPr lang="de-AT"/>
           </a:p>
@@ -6994,7 +6984,7 @@
           <a:p>
             <a:fld id="{A283F6F3-EBD4-4A96-B1FC-B82E01871E33}" type="datetimeFigureOut">
               <a:rPr lang="de-AT" smtClean="0"/>
-              <a:t>21.01.2026</a:t>
+              <a:t>13.04.2026</a:t>
             </a:fld>
             <a:endParaRPr lang="de-AT"/>
           </a:p>
@@ -7194,7 +7184,7 @@
           <a:p>
             <a:fld id="{A283F6F3-EBD4-4A96-B1FC-B82E01871E33}" type="datetimeFigureOut">
               <a:rPr lang="de-AT" smtClean="0"/>
-              <a:t>21.01.2026</a:t>
+              <a:t>13.04.2026</a:t>
             </a:fld>
             <a:endParaRPr lang="de-AT"/>
           </a:p>
@@ -7404,7 +7394,7 @@
           <a:p>
             <a:fld id="{A283F6F3-EBD4-4A96-B1FC-B82E01871E33}" type="datetimeFigureOut">
               <a:rPr lang="de-AT" smtClean="0"/>
-              <a:t>21.01.2026</a:t>
+              <a:t>13.04.2026</a:t>
             </a:fld>
             <a:endParaRPr lang="de-AT"/>
           </a:p>
@@ -7604,7 +7594,7 @@
           <a:p>
             <a:fld id="{A283F6F3-EBD4-4A96-B1FC-B82E01871E33}" type="datetimeFigureOut">
               <a:rPr lang="de-AT" smtClean="0"/>
-              <a:t>21.01.2026</a:t>
+              <a:t>13.04.2026</a:t>
             </a:fld>
             <a:endParaRPr lang="de-AT"/>
           </a:p>
@@ -7880,7 +7870,7 @@
           <a:p>
             <a:fld id="{A283F6F3-EBD4-4A96-B1FC-B82E01871E33}" type="datetimeFigureOut">
               <a:rPr lang="de-AT" smtClean="0"/>
-              <a:t>21.01.2026</a:t>
+              <a:t>13.04.2026</a:t>
             </a:fld>
             <a:endParaRPr lang="de-AT"/>
           </a:p>
@@ -8148,7 +8138,7 @@
           <a:p>
             <a:fld id="{A283F6F3-EBD4-4A96-B1FC-B82E01871E33}" type="datetimeFigureOut">
               <a:rPr lang="de-AT" smtClean="0"/>
-              <a:t>21.01.2026</a:t>
+              <a:t>13.04.2026</a:t>
             </a:fld>
             <a:endParaRPr lang="de-AT"/>
           </a:p>
@@ -8563,7 +8553,7 @@
           <a:p>
             <a:fld id="{A283F6F3-EBD4-4A96-B1FC-B82E01871E33}" type="datetimeFigureOut">
               <a:rPr lang="de-AT" smtClean="0"/>
-              <a:t>21.01.2026</a:t>
+              <a:t>13.04.2026</a:t>
             </a:fld>
             <a:endParaRPr lang="de-AT"/>
           </a:p>
@@ -8705,7 +8695,7 @@
           <a:p>
             <a:fld id="{A283F6F3-EBD4-4A96-B1FC-B82E01871E33}" type="datetimeFigureOut">
               <a:rPr lang="de-AT" smtClean="0"/>
-              <a:t>21.01.2026</a:t>
+              <a:t>13.04.2026</a:t>
             </a:fld>
             <a:endParaRPr lang="de-AT"/>
           </a:p>
@@ -8818,7 +8808,7 @@
           <a:p>
             <a:fld id="{A283F6F3-EBD4-4A96-B1FC-B82E01871E33}" type="datetimeFigureOut">
               <a:rPr lang="de-AT" smtClean="0"/>
-              <a:t>21.01.2026</a:t>
+              <a:t>13.04.2026</a:t>
             </a:fld>
             <a:endParaRPr lang="de-AT"/>
           </a:p>
@@ -9131,7 +9121,7 @@
           <a:p>
             <a:fld id="{A283F6F3-EBD4-4A96-B1FC-B82E01871E33}" type="datetimeFigureOut">
               <a:rPr lang="de-AT" smtClean="0"/>
-              <a:t>21.01.2026</a:t>
+              <a:t>13.04.2026</a:t>
             </a:fld>
             <a:endParaRPr lang="de-AT"/>
           </a:p>
@@ -9420,7 +9410,7 @@
           <a:p>
             <a:fld id="{A283F6F3-EBD4-4A96-B1FC-B82E01871E33}" type="datetimeFigureOut">
               <a:rPr lang="de-AT" smtClean="0"/>
-              <a:t>21.01.2026</a:t>
+              <a:t>13.04.2026</a:t>
             </a:fld>
             <a:endParaRPr lang="de-AT"/>
           </a:p>
@@ -9663,7 +9653,7 @@
           <a:p>
             <a:fld id="{A283F6F3-EBD4-4A96-B1FC-B82E01871E33}" type="datetimeFigureOut">
               <a:rPr lang="de-AT" smtClean="0"/>
-              <a:t>21.01.2026</a:t>
+              <a:t>13.04.2026</a:t>
             </a:fld>
             <a:endParaRPr lang="de-AT"/>
           </a:p>
@@ -10399,6 +10389,160 @@
 </file>
 
 <file path=ppt/slides/slide10.xml><?xml version="1.0" encoding="utf-8"?>
+<p:sld xmlns:a="http://schemas.openxmlformats.org/drawingml/2006/main" xmlns:r="http://schemas.openxmlformats.org/officeDocument/2006/relationships" xmlns:p="http://schemas.openxmlformats.org/presentationml/2006/main">
+  <p:cSld>
+    <p:spTree>
+      <p:nvGrpSpPr>
+        <p:cNvPr id="1" name="">
+          <a:extLst>
+            <a:ext uri="{FF2B5EF4-FFF2-40B4-BE49-F238E27FC236}">
+              <a16:creationId xmlns:a16="http://schemas.microsoft.com/office/drawing/2014/main" id="{3C7CA77B-D573-0F73-4478-9B49D7DD0BF2}"/>
+            </a:ext>
+          </a:extLst>
+        </p:cNvPr>
+        <p:cNvGrpSpPr/>
+        <p:nvPr/>
+      </p:nvGrpSpPr>
+      <p:grpSpPr>
+        <a:xfrm>
+          <a:off x="0" y="0"/>
+          <a:ext cx="0" cy="0"/>
+          <a:chOff x="0" y="0"/>
+          <a:chExt cx="0" cy="0"/>
+        </a:xfrm>
+      </p:grpSpPr>
+      <p:sp>
+        <p:nvSpPr>
+          <p:cNvPr id="2" name="Titel 1">
+            <a:extLst>
+              <a:ext uri="{FF2B5EF4-FFF2-40B4-BE49-F238E27FC236}">
+                <a16:creationId xmlns:a16="http://schemas.microsoft.com/office/drawing/2014/main" id="{3A288025-A3F7-8F76-78FB-E90CF2645874}"/>
+              </a:ext>
+            </a:extLst>
+          </p:cNvPr>
+          <p:cNvSpPr>
+            <a:spLocks noGrp="1"/>
+          </p:cNvSpPr>
+          <p:nvPr>
+            <p:ph type="title"/>
+          </p:nvPr>
+        </p:nvSpPr>
+        <p:spPr>
+          <a:xfrm>
+            <a:off x="838200" y="280458"/>
+            <a:ext cx="10515600" cy="1325563"/>
+          </a:xfrm>
+        </p:spPr>
+        <p:txBody>
+          <a:bodyPr>
+            <a:normAutofit/>
+          </a:bodyPr>
+          <a:lstStyle/>
+          <a:p>
+            <a:r>
+              <a:rPr lang="de-DE" sz="6000" b="1" dirty="0"/>
+              <a:t>Projektergebnisse</a:t>
+            </a:r>
+            <a:endParaRPr lang="de-AT" b="1" dirty="0"/>
+          </a:p>
+        </p:txBody>
+      </p:sp>
+      <p:sp>
+        <p:nvSpPr>
+          <p:cNvPr id="3" name="Inhaltsplatzhalter 2">
+            <a:extLst>
+              <a:ext uri="{FF2B5EF4-FFF2-40B4-BE49-F238E27FC236}">
+                <a16:creationId xmlns:a16="http://schemas.microsoft.com/office/drawing/2014/main" id="{5AFDE1B7-29D7-5BA3-1705-3314B95B3746}"/>
+              </a:ext>
+            </a:extLst>
+          </p:cNvPr>
+          <p:cNvSpPr>
+            <a:spLocks noGrp="1"/>
+          </p:cNvSpPr>
+          <p:nvPr>
+            <p:ph idx="1"/>
+          </p:nvPr>
+        </p:nvSpPr>
+        <p:spPr>
+          <a:xfrm>
+            <a:off x="838200" y="1606021"/>
+            <a:ext cx="10515600" cy="3817317"/>
+          </a:xfrm>
+        </p:spPr>
+        <p:txBody>
+          <a:bodyPr>
+            <a:normAutofit lnSpcReduction="10000"/>
+          </a:bodyPr>
+          <a:lstStyle/>
+          <a:p>
+            <a:pPr marL="0" indent="0">
+              <a:buNone/>
+            </a:pPr>
+            <a:r>
+              <a:rPr lang="de-AT" b="1" dirty="0" err="1"/>
+              <a:t>Adminbereich</a:t>
+            </a:r>
+            <a:endParaRPr lang="de-AT" b="1" dirty="0"/>
+          </a:p>
+          <a:p>
+            <a:r>
+              <a:rPr lang="de-DE" dirty="0"/>
+              <a:t>Produkte anlegen</a:t>
+            </a:r>
+          </a:p>
+          <a:p>
+            <a:r>
+              <a:rPr lang="de-DE" dirty="0"/>
+              <a:t>Bearbeiten</a:t>
+            </a:r>
+          </a:p>
+          <a:p>
+            <a:r>
+              <a:rPr lang="de-DE" dirty="0"/>
+              <a:t>Löschen</a:t>
+            </a:r>
+          </a:p>
+          <a:p>
+            <a:r>
+              <a:rPr lang="de-DE" dirty="0"/>
+              <a:t>Kategorien verwalten</a:t>
+            </a:r>
+          </a:p>
+          <a:p>
+            <a:r>
+              <a:rPr lang="de-DE" dirty="0"/>
+              <a:t>Lagerbestand einsehen</a:t>
+            </a:r>
+          </a:p>
+          <a:p>
+            <a:r>
+              <a:rPr lang="de-DE" dirty="0"/>
+              <a:t>Rechnungsübersicht anzeigen</a:t>
+            </a:r>
+          </a:p>
+          <a:p>
+            <a:r>
+              <a:rPr lang="de-DE" dirty="0"/>
+              <a:t>meistverkaufte Produkte analysieren</a:t>
+            </a:r>
+            <a:endParaRPr lang="de-AT" b="1" dirty="0"/>
+          </a:p>
+        </p:txBody>
+      </p:sp>
+    </p:spTree>
+    <p:extLst>
+      <p:ext uri="{BB962C8B-B14F-4D97-AF65-F5344CB8AC3E}">
+        <p14:creationId xmlns:p14="http://schemas.microsoft.com/office/powerpoint/2010/main" val="2972774515"/>
+      </p:ext>
+    </p:extLst>
+  </p:cSld>
+  <p:clrMapOvr>
+    <a:masterClrMapping/>
+  </p:clrMapOvr>
+</p:sld>
+</file>
+
+<file path=ppt/slides/slide11.xml><?xml version="1.0" encoding="utf-8"?>
 <p:sld xmlns:a="http://schemas.openxmlformats.org/drawingml/2006/main" xmlns:r="http://schemas.openxmlformats.org/officeDocument/2006/relationships" xmlns:p="http://schemas.openxmlformats.org/presentationml/2006/main">
   <p:cSld>
     <p:bg>
@@ -13079,13 +13223,13 @@
           <p:nvPr/>
         </p:nvPicPr>
         <p:blipFill>
-          <a:blip r:embed="rId2">
+          <a:blip>
             <a:extLst>
               <a:ext uri="{28A0092B-C50C-407E-A947-70E740481C1C}">
                 <a14:useLocalDpi xmlns:a14="http://schemas.microsoft.com/office/drawing/2010/main" val="0"/>
               </a:ext>
               <a:ext uri="{96DAC541-7B7A-43D3-8B79-37D633B846F1}">
-                <asvg:svgBlip xmlns:asvg="http://schemas.microsoft.com/office/drawing/2016/SVG/main" r:embed="rId3"/>
+                <asvg:svgBlip xmlns:asvg="http://schemas.microsoft.com/office/drawing/2016/SVG/main" r:embed="rId2"/>
               </a:ext>
             </a:extLst>
           </a:blip>
@@ -13116,585 +13260,7 @@
 </p:sld>
 </file>
 
-<file path=ppt/slides/slide11.xml><?xml version="1.0" encoding="utf-8"?>
-<p:sld xmlns:a="http://schemas.openxmlformats.org/drawingml/2006/main" xmlns:r="http://schemas.openxmlformats.org/officeDocument/2006/relationships" xmlns:p="http://schemas.openxmlformats.org/presentationml/2006/main">
-  <p:cSld>
-    <p:bg>
-      <p:bgPr>
-        <a:solidFill>
-          <a:schemeClr val="bg1"/>
-        </a:solidFill>
-        <a:effectLst/>
-      </p:bgPr>
-    </p:bg>
-    <p:spTree>
-      <p:nvGrpSpPr>
-        <p:cNvPr id="1" name="">
-          <a:extLst>
-            <a:ext uri="{FF2B5EF4-FFF2-40B4-BE49-F238E27FC236}">
-              <a16:creationId xmlns:a16="http://schemas.microsoft.com/office/drawing/2014/main" id="{F6AFD061-5459-F25A-9BE7-C73281B8AA23}"/>
-            </a:ext>
-          </a:extLst>
-        </p:cNvPr>
-        <p:cNvGrpSpPr/>
-        <p:nvPr/>
-      </p:nvGrpSpPr>
-      <p:grpSpPr>
-        <a:xfrm>
-          <a:off x="0" y="0"/>
-          <a:ext cx="0" cy="0"/>
-          <a:chOff x="0" y="0"/>
-          <a:chExt cx="0" cy="0"/>
-        </a:xfrm>
-      </p:grpSpPr>
-      <p:sp useBgFill="1">
-        <p:nvSpPr>
-          <p:cNvPr id="15" name="Rectangle 8">
-            <a:extLst>
-              <a:ext uri="{FF2B5EF4-FFF2-40B4-BE49-F238E27FC236}">
-                <a16:creationId xmlns:a16="http://schemas.microsoft.com/office/drawing/2014/main" id="{26CDBE12-1918-E305-62D0-74F31745D1EE}"/>
-              </a:ext>
-              <a:ext uri="{C183D7F6-B498-43B3-948B-1728B52AA6E4}">
-                <adec:decorative xmlns:adec="http://schemas.microsoft.com/office/drawing/2017/decorative" val="1"/>
-              </a:ext>
-            </a:extLst>
-          </p:cNvPr>
-          <p:cNvSpPr>
-            <a:spLocks noGrp="1" noRot="1" noChangeAspect="1" noMove="1" noResize="1" noEditPoints="1" noAdjustHandles="1" noChangeArrowheads="1" noChangeShapeType="1" noTextEdit="1"/>
-          </p:cNvSpPr>
-          <p:nvPr>
-            <p:extLst>
-              <p:ext uri="{386F3935-93C4-4BCD-93E2-E3B085C9AB24}">
-                <p16:designElem xmlns:p16="http://schemas.microsoft.com/office/powerpoint/2015/main" val="1"/>
-              </p:ext>
-            </p:extLst>
-          </p:nvPr>
-        </p:nvSpPr>
-        <p:spPr>
-          <a:xfrm>
-            <a:off x="0" y="0"/>
-            <a:ext cx="12192000" cy="6858000"/>
-          </a:xfrm>
-          <a:prstGeom prst="rect">
-            <a:avLst/>
-          </a:prstGeom>
-          <a:ln>
-            <a:noFill/>
-          </a:ln>
-        </p:spPr>
-        <p:style>
-          <a:lnRef idx="2">
-            <a:schemeClr val="accent1">
-              <a:shade val="50000"/>
-            </a:schemeClr>
-          </a:lnRef>
-          <a:fillRef idx="1">
-            <a:schemeClr val="accent1"/>
-          </a:fillRef>
-          <a:effectRef idx="0">
-            <a:schemeClr val="accent1"/>
-          </a:effectRef>
-          <a:fontRef idx="minor">
-            <a:schemeClr val="lt1"/>
-          </a:fontRef>
-        </p:style>
-        <p:txBody>
-          <a:bodyPr rtlCol="0" anchor="ctr"/>
-          <a:lstStyle/>
-          <a:p>
-            <a:pPr algn="ctr"/>
-            <a:endParaRPr lang="en-US"/>
-          </a:p>
-        </p:txBody>
-      </p:sp>
-      <p:sp>
-        <p:nvSpPr>
-          <p:cNvPr id="4" name="Titel 3">
-            <a:extLst>
-              <a:ext uri="{FF2B5EF4-FFF2-40B4-BE49-F238E27FC236}">
-                <a16:creationId xmlns:a16="http://schemas.microsoft.com/office/drawing/2014/main" id="{EF2E4972-CDC4-0C1D-CD4C-283CB61CA184}"/>
-              </a:ext>
-            </a:extLst>
-          </p:cNvPr>
-          <p:cNvSpPr>
-            <a:spLocks noGrp="1"/>
-          </p:cNvSpPr>
-          <p:nvPr>
-            <p:ph type="title"/>
-          </p:nvPr>
-        </p:nvSpPr>
-        <p:spPr>
-          <a:xfrm>
-            <a:off x="558210" y="1365472"/>
-            <a:ext cx="10978470" cy="3564636"/>
-          </a:xfrm>
-        </p:spPr>
-        <p:txBody>
-          <a:bodyPr vert="horz" lIns="91440" tIns="45720" rIns="91440" bIns="45720" rtlCol="0" anchor="ctr">
-            <a:normAutofit/>
-          </a:bodyPr>
-          <a:lstStyle/>
-          <a:p>
-            <a:r>
-              <a:rPr lang="en-US" sz="6600" kern="1200" dirty="0" err="1">
-                <a:solidFill>
-                  <a:schemeClr val="tx1"/>
-                </a:solidFill>
-                <a:latin typeface="+mj-lt"/>
-                <a:ea typeface="+mj-ea"/>
-                <a:cs typeface="+mj-cs"/>
-              </a:rPr>
-              <a:t>Herausforderungen</a:t>
-            </a:r>
-            <a:r>
-              <a:rPr lang="en-US" sz="6600" kern="1200" dirty="0">
-                <a:solidFill>
-                  <a:schemeClr val="tx1"/>
-                </a:solidFill>
-                <a:latin typeface="+mj-lt"/>
-                <a:ea typeface="+mj-ea"/>
-                <a:cs typeface="+mj-cs"/>
-              </a:rPr>
-              <a:t> &amp; Learnings</a:t>
-            </a:r>
-          </a:p>
-        </p:txBody>
-      </p:sp>
-      <p:sp>
-        <p:nvSpPr>
-          <p:cNvPr id="16" name="Rectangle 10">
-            <a:extLst>
-              <a:ext uri="{FF2B5EF4-FFF2-40B4-BE49-F238E27FC236}">
-                <a16:creationId xmlns:a16="http://schemas.microsoft.com/office/drawing/2014/main" id="{1F9CC0A3-EEF6-3491-CB1D-2AD157D3F632}"/>
-              </a:ext>
-              <a:ext uri="{C183D7F6-B498-43B3-948B-1728B52AA6E4}">
-                <adec:decorative xmlns:adec="http://schemas.microsoft.com/office/drawing/2017/decorative" val="1"/>
-              </a:ext>
-            </a:extLst>
-          </p:cNvPr>
-          <p:cNvSpPr>
-            <a:spLocks noGrp="1" noRot="1" noChangeAspect="1" noMove="1" noResize="1" noEditPoints="1" noAdjustHandles="1" noChangeArrowheads="1" noChangeShapeType="1" noTextEdit="1"/>
-          </p:cNvSpPr>
-          <p:nvPr>
-            <p:extLst>
-              <p:ext uri="{386F3935-93C4-4BCD-93E2-E3B085C9AB24}">
-                <p16:designElem xmlns:p16="http://schemas.microsoft.com/office/powerpoint/2015/main" val="1"/>
-              </p:ext>
-            </p:extLst>
-          </p:nvPr>
-        </p:nvSpPr>
-        <p:spPr>
-          <a:xfrm>
-            <a:off x="0" y="1913350"/>
-            <a:ext cx="128016" cy="2468880"/>
-          </a:xfrm>
-          <a:prstGeom prst="rect">
-            <a:avLst/>
-          </a:prstGeom>
-          <a:solidFill>
-            <a:schemeClr val="accent2"/>
-          </a:solidFill>
-          <a:ln>
-            <a:noFill/>
-          </a:ln>
-        </p:spPr>
-        <p:style>
-          <a:lnRef idx="2">
-            <a:schemeClr val="accent1">
-              <a:shade val="50000"/>
-            </a:schemeClr>
-          </a:lnRef>
-          <a:fillRef idx="1">
-            <a:schemeClr val="accent1"/>
-          </a:fillRef>
-          <a:effectRef idx="0">
-            <a:schemeClr val="accent1"/>
-          </a:effectRef>
-          <a:fontRef idx="minor">
-            <a:schemeClr val="lt1"/>
-          </a:fontRef>
-        </p:style>
-        <p:txBody>
-          <a:bodyPr rtlCol="0" anchor="ctr"/>
-          <a:lstStyle/>
-          <a:p>
-            <a:pPr marL="0" marR="0" lvl="0" indent="0" algn="ctr" defTabSz="914400" rtl="0" eaLnBrk="1" fontAlgn="auto" latinLnBrk="0" hangingPunct="1">
-              <a:lnSpc>
-                <a:spcPct val="100000"/>
-              </a:lnSpc>
-              <a:spcBef>
-                <a:spcPts val="0"/>
-              </a:spcBef>
-              <a:spcAft>
-                <a:spcPts val="0"/>
-              </a:spcAft>
-              <a:buClrTx/>
-              <a:buSzTx/>
-              <a:buFontTx/>
-              <a:buNone/>
-              <a:tabLst/>
-              <a:defRPr/>
-            </a:pPr>
-            <a:endParaRPr kumimoji="0" lang="en-US" sz="1800" b="0" i="0" u="none" strike="noStrike" kern="1200" cap="none" spc="0" normalizeH="0" baseline="0" noProof="0" dirty="0">
-              <a:ln>
-                <a:noFill/>
-              </a:ln>
-              <a:solidFill>
-                <a:prstClr val="white"/>
-              </a:solidFill>
-              <a:effectLst/>
-              <a:uLnTx/>
-              <a:uFillTx/>
-              <a:latin typeface="Calibri" panose="020F0502020204030204"/>
-              <a:ea typeface="+mn-ea"/>
-              <a:cs typeface="+mn-cs"/>
-            </a:endParaRPr>
-          </a:p>
-        </p:txBody>
-      </p:sp>
-      <p:sp>
-        <p:nvSpPr>
-          <p:cNvPr id="17" name="Rectangle 12">
-            <a:extLst>
-              <a:ext uri="{FF2B5EF4-FFF2-40B4-BE49-F238E27FC236}">
-                <a16:creationId xmlns:a16="http://schemas.microsoft.com/office/drawing/2014/main" id="{F3B55B5B-8C0E-5D87-D9D2-E75ABD0ACBF5}"/>
-              </a:ext>
-              <a:ext uri="{C183D7F6-B498-43B3-948B-1728B52AA6E4}">
-                <adec:decorative xmlns:adec="http://schemas.microsoft.com/office/drawing/2017/decorative" val="1"/>
-              </a:ext>
-            </a:extLst>
-          </p:cNvPr>
-          <p:cNvSpPr>
-            <a:spLocks noGrp="1" noRot="1" noChangeAspect="1" noMove="1" noResize="1" noEditPoints="1" noAdjustHandles="1" noChangeArrowheads="1" noChangeShapeType="1" noTextEdit="1"/>
-          </p:cNvSpPr>
-          <p:nvPr>
-            <p:extLst>
-              <p:ext uri="{386F3935-93C4-4BCD-93E2-E3B085C9AB24}">
-                <p16:designElem xmlns:p16="http://schemas.microsoft.com/office/powerpoint/2015/main" val="1"/>
-              </p:ext>
-            </p:extLst>
-          </p:nvPr>
-        </p:nvSpPr>
-        <p:spPr>
-          <a:xfrm>
-            <a:off x="650945" y="5831269"/>
-            <a:ext cx="10927080" cy="18288"/>
-          </a:xfrm>
-          <a:prstGeom prst="rect">
-            <a:avLst/>
-          </a:prstGeom>
-          <a:solidFill>
-            <a:srgbClr val="D5D5D5"/>
-          </a:solidFill>
-          <a:ln w="3175">
-            <a:noFill/>
-          </a:ln>
-          <a:effectLst/>
-        </p:spPr>
-        <p:style>
-          <a:lnRef idx="2">
-            <a:schemeClr val="accent1">
-              <a:shade val="50000"/>
-            </a:schemeClr>
-          </a:lnRef>
-          <a:fillRef idx="1">
-            <a:schemeClr val="accent1"/>
-          </a:fillRef>
-          <a:effectRef idx="0">
-            <a:schemeClr val="accent1"/>
-          </a:effectRef>
-          <a:fontRef idx="minor">
-            <a:schemeClr val="lt1"/>
-          </a:fontRef>
-        </p:style>
-        <p:txBody>
-          <a:bodyPr rtlCol="0" anchor="ctr"/>
-          <a:lstStyle/>
-          <a:p>
-            <a:pPr algn="ctr"/>
-            <a:endParaRPr lang="en-US">
-              <a:solidFill>
-                <a:prstClr val="white"/>
-              </a:solidFill>
-              <a:latin typeface="Calibri" panose="020F0502020204030204"/>
-            </a:endParaRPr>
-          </a:p>
-        </p:txBody>
-      </p:sp>
-    </p:spTree>
-    <p:extLst>
-      <p:ext uri="{BB962C8B-B14F-4D97-AF65-F5344CB8AC3E}">
-        <p14:creationId xmlns:p14="http://schemas.microsoft.com/office/powerpoint/2010/main" val="3247427672"/>
-      </p:ext>
-    </p:extLst>
-  </p:cSld>
-  <p:clrMapOvr>
-    <a:masterClrMapping/>
-  </p:clrMapOvr>
-</p:sld>
-</file>
-
 <file path=ppt/slides/slide12.xml><?xml version="1.0" encoding="utf-8"?>
-<p:sld xmlns:a="http://schemas.openxmlformats.org/drawingml/2006/main" xmlns:r="http://schemas.openxmlformats.org/officeDocument/2006/relationships" xmlns:p="http://schemas.openxmlformats.org/presentationml/2006/main">
-  <p:cSld>
-    <p:spTree>
-      <p:nvGrpSpPr>
-        <p:cNvPr id="1" name="">
-          <a:extLst>
-            <a:ext uri="{FF2B5EF4-FFF2-40B4-BE49-F238E27FC236}">
-              <a16:creationId xmlns:a16="http://schemas.microsoft.com/office/drawing/2014/main" id="{360022D0-A92D-D252-70B1-B266F1626DAF}"/>
-            </a:ext>
-          </a:extLst>
-        </p:cNvPr>
-        <p:cNvGrpSpPr/>
-        <p:nvPr/>
-      </p:nvGrpSpPr>
-      <p:grpSpPr>
-        <a:xfrm>
-          <a:off x="0" y="0"/>
-          <a:ext cx="0" cy="0"/>
-          <a:chOff x="0" y="0"/>
-          <a:chExt cx="0" cy="0"/>
-        </a:xfrm>
-      </p:grpSpPr>
-      <p:sp>
-        <p:nvSpPr>
-          <p:cNvPr id="2" name="Titel 1">
-            <a:extLst>
-              <a:ext uri="{FF2B5EF4-FFF2-40B4-BE49-F238E27FC236}">
-                <a16:creationId xmlns:a16="http://schemas.microsoft.com/office/drawing/2014/main" id="{6EE32771-CDC4-8B68-7C9D-283BD2716B07}"/>
-              </a:ext>
-            </a:extLst>
-          </p:cNvPr>
-          <p:cNvSpPr>
-            <a:spLocks noGrp="1"/>
-          </p:cNvSpPr>
-          <p:nvPr>
-            <p:ph type="title"/>
-          </p:nvPr>
-        </p:nvSpPr>
-        <p:spPr>
-          <a:xfrm>
-            <a:off x="838200" y="280458"/>
-            <a:ext cx="10515600" cy="1325563"/>
-          </a:xfrm>
-        </p:spPr>
-        <p:txBody>
-          <a:bodyPr>
-            <a:normAutofit/>
-          </a:bodyPr>
-          <a:lstStyle/>
-          <a:p>
-            <a:r>
-              <a:rPr lang="de-DE" sz="6000" b="1" dirty="0"/>
-              <a:t>Herausforderungen</a:t>
-            </a:r>
-            <a:endParaRPr lang="de-AT" b="1" dirty="0"/>
-          </a:p>
-        </p:txBody>
-      </p:sp>
-      <p:sp>
-        <p:nvSpPr>
-          <p:cNvPr id="3" name="Inhaltsplatzhalter 2">
-            <a:extLst>
-              <a:ext uri="{FF2B5EF4-FFF2-40B4-BE49-F238E27FC236}">
-                <a16:creationId xmlns:a16="http://schemas.microsoft.com/office/drawing/2014/main" id="{0CDD7A6D-2E3D-758C-D528-FBC7B37B8387}"/>
-              </a:ext>
-            </a:extLst>
-          </p:cNvPr>
-          <p:cNvSpPr>
-            <a:spLocks noGrp="1"/>
-          </p:cNvSpPr>
-          <p:nvPr>
-            <p:ph idx="1"/>
-          </p:nvPr>
-        </p:nvSpPr>
-        <p:spPr>
-          <a:xfrm>
-            <a:off x="838200" y="1606021"/>
-            <a:ext cx="10515600" cy="4797342"/>
-          </a:xfrm>
-        </p:spPr>
-        <p:txBody>
-          <a:bodyPr>
-            <a:normAutofit/>
-          </a:bodyPr>
-          <a:lstStyle/>
-          <a:p>
-            <a:r>
-              <a:rPr lang="de-DE" sz="2800" b="1" dirty="0"/>
-              <a:t>Erste Zusammenarbeit im Team</a:t>
-            </a:r>
-          </a:p>
-          <a:p>
-            <a:r>
-              <a:rPr lang="de-DE" b="1" dirty="0"/>
-              <a:t>Kurze Eingewöhnungsphase</a:t>
-            </a:r>
-          </a:p>
-          <a:p>
-            <a:r>
-              <a:rPr lang="de-DE" sz="2800" b="1" dirty="0" err="1"/>
-              <a:t>Checkout</a:t>
-            </a:r>
-            <a:endParaRPr lang="de-DE" b="1" dirty="0"/>
-          </a:p>
-          <a:p>
-            <a:pPr lvl="1"/>
-            <a:r>
-              <a:rPr lang="de-DE" dirty="0"/>
-              <a:t>Lösung: Rechnung statt Zahlung</a:t>
-            </a:r>
-          </a:p>
-          <a:p>
-            <a:pPr lvl="1"/>
-            <a:r>
-              <a:rPr lang="de-DE" dirty="0"/>
-              <a:t>Passend für Prototyp</a:t>
-            </a:r>
-          </a:p>
-        </p:txBody>
-      </p:sp>
-    </p:spTree>
-    <p:extLst>
-      <p:ext uri="{BB962C8B-B14F-4D97-AF65-F5344CB8AC3E}">
-        <p14:creationId xmlns:p14="http://schemas.microsoft.com/office/powerpoint/2010/main" val="1017764230"/>
-      </p:ext>
-    </p:extLst>
-  </p:cSld>
-  <p:clrMapOvr>
-    <a:masterClrMapping/>
-  </p:clrMapOvr>
-</p:sld>
-</file>
-
-<file path=ppt/slides/slide13.xml><?xml version="1.0" encoding="utf-8"?>
-<p:sld xmlns:a="http://schemas.openxmlformats.org/drawingml/2006/main" xmlns:r="http://schemas.openxmlformats.org/officeDocument/2006/relationships" xmlns:p="http://schemas.openxmlformats.org/presentationml/2006/main">
-  <p:cSld>
-    <p:spTree>
-      <p:nvGrpSpPr>
-        <p:cNvPr id="1" name="">
-          <a:extLst>
-            <a:ext uri="{FF2B5EF4-FFF2-40B4-BE49-F238E27FC236}">
-              <a16:creationId xmlns:a16="http://schemas.microsoft.com/office/drawing/2014/main" id="{182C5007-3139-5156-EC58-0A999B5CB817}"/>
-            </a:ext>
-          </a:extLst>
-        </p:cNvPr>
-        <p:cNvGrpSpPr/>
-        <p:nvPr/>
-      </p:nvGrpSpPr>
-      <p:grpSpPr>
-        <a:xfrm>
-          <a:off x="0" y="0"/>
-          <a:ext cx="0" cy="0"/>
-          <a:chOff x="0" y="0"/>
-          <a:chExt cx="0" cy="0"/>
-        </a:xfrm>
-      </p:grpSpPr>
-      <p:sp>
-        <p:nvSpPr>
-          <p:cNvPr id="2" name="Titel 1">
-            <a:extLst>
-              <a:ext uri="{FF2B5EF4-FFF2-40B4-BE49-F238E27FC236}">
-                <a16:creationId xmlns:a16="http://schemas.microsoft.com/office/drawing/2014/main" id="{5A1B4A8B-E3F3-B7D3-87CB-43D4752591C5}"/>
-              </a:ext>
-            </a:extLst>
-          </p:cNvPr>
-          <p:cNvSpPr>
-            <a:spLocks noGrp="1"/>
-          </p:cNvSpPr>
-          <p:nvPr>
-            <p:ph type="title"/>
-          </p:nvPr>
-        </p:nvSpPr>
-        <p:spPr>
-          <a:xfrm>
-            <a:off x="838200" y="280458"/>
-            <a:ext cx="10515600" cy="1325563"/>
-          </a:xfrm>
-        </p:spPr>
-        <p:txBody>
-          <a:bodyPr>
-            <a:normAutofit/>
-          </a:bodyPr>
-          <a:lstStyle/>
-          <a:p>
-            <a:r>
-              <a:rPr lang="de-DE" sz="6000" b="1"/>
-              <a:t>Learnings</a:t>
-            </a:r>
-            <a:endParaRPr lang="de-AT" b="1" dirty="0"/>
-          </a:p>
-        </p:txBody>
-      </p:sp>
-      <p:sp>
-        <p:nvSpPr>
-          <p:cNvPr id="3" name="Inhaltsplatzhalter 2">
-            <a:extLst>
-              <a:ext uri="{FF2B5EF4-FFF2-40B4-BE49-F238E27FC236}">
-                <a16:creationId xmlns:a16="http://schemas.microsoft.com/office/drawing/2014/main" id="{BDD9F448-B1B2-0EAB-DB25-77AECF24D85C}"/>
-              </a:ext>
-            </a:extLst>
-          </p:cNvPr>
-          <p:cNvSpPr>
-            <a:spLocks noGrp="1"/>
-          </p:cNvSpPr>
-          <p:nvPr>
-            <p:ph idx="1"/>
-          </p:nvPr>
-        </p:nvSpPr>
-        <p:spPr>
-          <a:xfrm>
-            <a:off x="838200" y="1606021"/>
-            <a:ext cx="10515600" cy="4797342"/>
-          </a:xfrm>
-        </p:spPr>
-        <p:txBody>
-          <a:bodyPr>
-            <a:normAutofit/>
-          </a:bodyPr>
-          <a:lstStyle/>
-          <a:p>
-            <a:r>
-              <a:rPr lang="de-DE" sz="2800" b="1" dirty="0"/>
-              <a:t>Klare Aufgabenverteilung ist entscheidend</a:t>
-            </a:r>
-          </a:p>
-          <a:p>
-            <a:r>
-              <a:rPr lang="de-DE" b="1" dirty="0"/>
-              <a:t>Daily Meetings verhindern Missverständnisse</a:t>
-            </a:r>
-          </a:p>
-          <a:p>
-            <a:r>
-              <a:rPr lang="de-DE" b="1" dirty="0"/>
-              <a:t>Gute Designphase spart viel Zeit</a:t>
-            </a:r>
-          </a:p>
-          <a:p>
-            <a:r>
-              <a:rPr lang="de-DE" b="1" dirty="0"/>
-              <a:t>Strukturierte Planung = besseres Ergebnis </a:t>
-            </a:r>
-            <a:endParaRPr lang="de-DE" dirty="0"/>
-          </a:p>
-        </p:txBody>
-      </p:sp>
-    </p:spTree>
-    <p:extLst>
-      <p:ext uri="{BB962C8B-B14F-4D97-AF65-F5344CB8AC3E}">
-        <p14:creationId xmlns:p14="http://schemas.microsoft.com/office/powerpoint/2010/main" val="3867710003"/>
-      </p:ext>
-    </p:extLst>
-  </p:cSld>
-  <p:clrMapOvr>
-    <a:masterClrMapping/>
-  </p:clrMapOvr>
-</p:sld>
-</file>
-
-<file path=ppt/slides/slide14.xml><?xml version="1.0" encoding="utf-8"?>
 <p:sld xmlns:a="http://schemas.openxmlformats.org/drawingml/2006/main" xmlns:r="http://schemas.openxmlformats.org/officeDocument/2006/relationships" xmlns:p="http://schemas.openxmlformats.org/presentationml/2006/main">
   <p:cSld>
     <p:bg>
@@ -14010,7 +13576,7 @@
 </p:sld>
 </file>
 
-<file path=ppt/slides/slide15.xml><?xml version="1.0" encoding="utf-8"?>
+<file path=ppt/slides/slide13.xml><?xml version="1.0" encoding="utf-8"?>
 <p:sld xmlns:a="http://schemas.openxmlformats.org/drawingml/2006/main" xmlns:r="http://schemas.openxmlformats.org/officeDocument/2006/relationships" xmlns:p="http://schemas.openxmlformats.org/presentationml/2006/main">
   <p:cSld>
     <p:spTree>
@@ -14113,7 +13679,7 @@
 </p:sld>
 </file>
 
-<file path=ppt/slides/slide16.xml><?xml version="1.0" encoding="utf-8"?>
+<file path=ppt/slides/slide14.xml><?xml version="1.0" encoding="utf-8"?>
 <p:sld xmlns:a="http://schemas.openxmlformats.org/drawingml/2006/main" xmlns:r="http://schemas.openxmlformats.org/officeDocument/2006/relationships" xmlns:p="http://schemas.openxmlformats.org/presentationml/2006/main">
   <p:cSld>
     <p:bg>
@@ -14261,13 +13827,13 @@
           <p:nvPr/>
         </p:nvPicPr>
         <p:blipFill>
-          <a:blip r:embed="rId2">
+          <a:blip>
             <a:extLst>
               <a:ext uri="{28A0092B-C50C-407E-A947-70E740481C1C}">
                 <a14:useLocalDpi xmlns:a14="http://schemas.microsoft.com/office/drawing/2010/main" val="0"/>
               </a:ext>
               <a:ext uri="{96DAC541-7B7A-43D3-8B79-37D633B846F1}">
-                <asvg:svgBlip xmlns:asvg="http://schemas.microsoft.com/office/drawing/2016/SVG/main" r:embed="rId3"/>
+                <asvg:svgBlip xmlns:asvg="http://schemas.microsoft.com/office/drawing/2016/SVG/main" r:embed="rId2"/>
               </a:ext>
             </a:extLst>
           </a:blip>
@@ -14309,14 +13875,14 @@
           </p:nvPr>
         </p:nvPicPr>
         <p:blipFill>
-          <a:blip r:embed="rId2">
+          <a:blip>
             <a:alphaModFix amt="15000"/>
             <a:extLst>
               <a:ext uri="{28A0092B-C50C-407E-A947-70E740481C1C}">
                 <a14:useLocalDpi xmlns:a14="http://schemas.microsoft.com/office/drawing/2010/main" val="0"/>
               </a:ext>
               <a:ext uri="{96DAC541-7B7A-43D3-8B79-37D633B846F1}">
-                <asvg:svgBlip xmlns:asvg="http://schemas.microsoft.com/office/drawing/2016/SVG/main" r:embed="rId3"/>
+                <asvg:svgBlip xmlns:asvg="http://schemas.microsoft.com/office/drawing/2016/SVG/main" r:embed="rId2"/>
               </a:ext>
             </a:extLst>
           </a:blip>
@@ -14409,7 +13975,7 @@
             <p:ph idx="1"/>
             <p:extLst>
               <p:ext uri="{D42A27DB-BD31-4B8C-83A1-F6EECF244321}">
-                <p14:modId xmlns:p14="http://schemas.microsoft.com/office/powerpoint/2010/main" val="1365787542"/>
+                <p14:modId xmlns:p14="http://schemas.microsoft.com/office/powerpoint/2010/main" val="3219816725"/>
               </p:ext>
             </p:extLst>
           </p:nvPr>
@@ -14595,7 +14161,7 @@
         <p:cNvPr id="1" name="">
           <a:extLst>
             <a:ext uri="{FF2B5EF4-FFF2-40B4-BE49-F238E27FC236}">
-              <a16:creationId xmlns:a16="http://schemas.microsoft.com/office/drawing/2014/main" id="{C7E590A1-F2D1-4B2F-62A0-D0E37BACC288}"/>
+              <a16:creationId xmlns:a16="http://schemas.microsoft.com/office/drawing/2014/main" id="{0493B83B-EFF0-EB0C-DCDC-FFCDF9E6022F}"/>
             </a:ext>
           </a:extLst>
         </p:cNvPr>
@@ -14615,7 +14181,7 @@
           <p:cNvPr id="2" name="Titel 1">
             <a:extLst>
               <a:ext uri="{FF2B5EF4-FFF2-40B4-BE49-F238E27FC236}">
-                <a16:creationId xmlns:a16="http://schemas.microsoft.com/office/drawing/2014/main" id="{B3C8B7FF-5FAA-4E38-8B69-FFA13BB8C345}"/>
+                <a16:creationId xmlns:a16="http://schemas.microsoft.com/office/drawing/2014/main" id="{CC74AEE8-EE70-5FED-5B5D-1B155F0C05B5}"/>
               </a:ext>
             </a:extLst>
           </p:cNvPr>
@@ -14633,12 +14199,14 @@
           </a:xfrm>
         </p:spPr>
         <p:txBody>
-          <a:bodyPr/>
+          <a:bodyPr>
+            <a:normAutofit/>
+          </a:bodyPr>
           <a:lstStyle/>
           <a:p>
             <a:r>
-              <a:rPr lang="de-AT" sz="6000" b="1" dirty="0"/>
-              <a:t>Projektorganisation</a:t>
+              <a:rPr lang="de-DE" sz="6000" b="1" dirty="0"/>
+              <a:t>Technische Umsetzung</a:t>
             </a:r>
             <a:endParaRPr lang="de-AT" b="1" dirty="0"/>
           </a:p>
@@ -14649,7 +14217,7 @@
           <p:cNvPr id="3" name="Inhaltsplatzhalter 2">
             <a:extLst>
               <a:ext uri="{FF2B5EF4-FFF2-40B4-BE49-F238E27FC236}">
-                <a16:creationId xmlns:a16="http://schemas.microsoft.com/office/drawing/2014/main" id="{449A4100-C1E6-1096-5786-2378F682B30E}"/>
+                <a16:creationId xmlns:a16="http://schemas.microsoft.com/office/drawing/2014/main" id="{43BEBD6E-9EDF-FD7A-F764-FA1D544E634A}"/>
               </a:ext>
             </a:extLst>
           </p:cNvPr>
@@ -14663,110 +14231,70 @@
         <p:spPr>
           <a:xfrm>
             <a:off x="838200" y="1606021"/>
-            <a:ext cx="10515600" cy="4797342"/>
+            <a:ext cx="10515600" cy="3817317"/>
           </a:xfrm>
         </p:spPr>
         <p:txBody>
           <a:bodyPr>
-            <a:normAutofit lnSpcReduction="10000"/>
+            <a:normAutofit/>
           </a:bodyPr>
           <a:lstStyle/>
           <a:p>
-            <a:r>
-              <a:rPr lang="de-DE" sz="3200" b="1" dirty="0"/>
-              <a:t>Team</a:t>
-            </a:r>
-            <a:endParaRPr lang="de-DE" b="1" dirty="0"/>
-          </a:p>
-          <a:p>
-            <a:pPr lvl="1"/>
-            <a:r>
-              <a:rPr lang="de-DE" sz="2800" dirty="0"/>
-              <a:t>Julian Halbmayr – Design (Figma) &amp; Projektmanagement</a:t>
-            </a:r>
-          </a:p>
-          <a:p>
-            <a:pPr lvl="1"/>
-            <a:r>
-              <a:rPr lang="de-DE" sz="2800" dirty="0"/>
-              <a:t>Laurenz Berchtold – Implementierung &amp; Projektmanagement</a:t>
-            </a:r>
-          </a:p>
-          <a:p>
-            <a:pPr marL="457200" lvl="1" indent="0">
+            <a:pPr marL="0" indent="0">
               <a:buNone/>
             </a:pPr>
-            <a:endParaRPr lang="de-DE" sz="2800" dirty="0"/>
-          </a:p>
-          <a:p>
             <a:r>
-              <a:rPr lang="de-DE" sz="3200" b="1" dirty="0"/>
-              <a:t>Technologien</a:t>
+              <a:rPr lang="de-AT" b="1" dirty="0"/>
+              <a:t>Verwendete Technologien</a:t>
             </a:r>
           </a:p>
           <a:p>
-            <a:pPr lvl="1"/>
             <a:r>
-              <a:rPr lang="fr-FR" sz="2800" dirty="0" err="1"/>
-              <a:t>Razor</a:t>
+              <a:rPr lang="de-AT" dirty="0"/>
+              <a:t>ASP.NET Core Razor Pages</a:t>
             </a:r>
+          </a:p>
+          <a:p>
             <a:r>
-              <a:rPr lang="fr-FR" sz="2800" dirty="0"/>
-              <a:t> Pages (ASP.NET </a:t>
+              <a:rPr lang="de-AT" dirty="0"/>
+              <a:t>C#</a:t>
             </a:r>
+          </a:p>
+          <a:p>
             <a:r>
-              <a:rPr lang="fr-FR" sz="2800" dirty="0" err="1"/>
-              <a:t>Core</a:t>
+              <a:rPr lang="de-AT" dirty="0"/>
+              <a:t>HTML / CSS / Bootstrap</a:t>
             </a:r>
+          </a:p>
+          <a:p>
             <a:r>
-              <a:rPr lang="fr-FR" sz="2800" dirty="0"/>
-              <a:t>)</a:t>
+              <a:rPr lang="de-AT" dirty="0"/>
+              <a:t>GitHub </a:t>
             </a:r>
           </a:p>
           <a:p>
-            <a:pPr marL="457200" lvl="1" indent="0">
-              <a:buNone/>
-            </a:pPr>
-            <a:endParaRPr lang="de-DE" sz="2800" dirty="0"/>
-          </a:p>
-          <a:p>
             <a:r>
-              <a:rPr lang="de-DE" sz="3200" b="1" dirty="0"/>
-              <a:t>Tools</a:t>
+              <a:rPr lang="de-AT" dirty="0"/>
+              <a:t>Figma</a:t>
             </a:r>
           </a:p>
           <a:p>
-            <a:pPr lvl="1"/>
             <a:r>
-              <a:rPr lang="de-DE" sz="2800" dirty="0"/>
+              <a:rPr lang="de-AT" dirty="0"/>
               <a:t>Jira &amp; </a:t>
             </a:r>
             <a:r>
-              <a:rPr lang="de-DE" sz="2800" dirty="0" err="1"/>
+              <a:rPr lang="de-AT" dirty="0" err="1"/>
               <a:t>Confluence</a:t>
             </a:r>
-            <a:endParaRPr lang="de-DE" sz="2800" dirty="0"/>
-          </a:p>
-          <a:p>
-            <a:pPr lvl="1"/>
-            <a:r>
-              <a:rPr lang="de-DE" sz="2800" dirty="0"/>
-              <a:t>GitHub</a:t>
-            </a:r>
-          </a:p>
-          <a:p>
-            <a:pPr lvl="1"/>
-            <a:r>
-              <a:rPr lang="de-DE" sz="2800" dirty="0"/>
-              <a:t>Figma</a:t>
-            </a:r>
+            <a:endParaRPr lang="de-AT" dirty="0"/>
           </a:p>
         </p:txBody>
       </p:sp>
     </p:spTree>
     <p:extLst>
       <p:ext uri="{BB962C8B-B14F-4D97-AF65-F5344CB8AC3E}">
-        <p14:creationId xmlns:p14="http://schemas.microsoft.com/office/powerpoint/2010/main" val="4289204130"/>
+        <p14:creationId xmlns:p14="http://schemas.microsoft.com/office/powerpoint/2010/main" val="479477395"/>
       </p:ext>
     </p:extLst>
   </p:cSld>
@@ -14777,184 +14305,6 @@
 </file>
 
 <file path=ppt/slides/slide5.xml><?xml version="1.0" encoding="utf-8"?>
-<p:sld xmlns:a="http://schemas.openxmlformats.org/drawingml/2006/main" xmlns:r="http://schemas.openxmlformats.org/officeDocument/2006/relationships" xmlns:p="http://schemas.openxmlformats.org/presentationml/2006/main">
-  <p:cSld>
-    <p:spTree>
-      <p:nvGrpSpPr>
-        <p:cNvPr id="1" name="">
-          <a:extLst>
-            <a:ext uri="{FF2B5EF4-FFF2-40B4-BE49-F238E27FC236}">
-              <a16:creationId xmlns:a16="http://schemas.microsoft.com/office/drawing/2014/main" id="{71396374-C44A-5F52-EA08-244B38395226}"/>
-            </a:ext>
-          </a:extLst>
-        </p:cNvPr>
-        <p:cNvGrpSpPr/>
-        <p:nvPr/>
-      </p:nvGrpSpPr>
-      <p:grpSpPr>
-        <a:xfrm>
-          <a:off x="0" y="0"/>
-          <a:ext cx="0" cy="0"/>
-          <a:chOff x="0" y="0"/>
-          <a:chExt cx="0" cy="0"/>
-        </a:xfrm>
-      </p:grpSpPr>
-      <p:sp>
-        <p:nvSpPr>
-          <p:cNvPr id="2" name="Titel 1">
-            <a:extLst>
-              <a:ext uri="{FF2B5EF4-FFF2-40B4-BE49-F238E27FC236}">
-                <a16:creationId xmlns:a16="http://schemas.microsoft.com/office/drawing/2014/main" id="{225458EF-C9AD-F6BD-2040-D3048B709551}"/>
-              </a:ext>
-            </a:extLst>
-          </p:cNvPr>
-          <p:cNvSpPr>
-            <a:spLocks noGrp="1"/>
-          </p:cNvSpPr>
-          <p:nvPr>
-            <p:ph type="title"/>
-          </p:nvPr>
-        </p:nvSpPr>
-        <p:spPr>
-          <a:xfrm>
-            <a:off x="838200" y="280458"/>
-            <a:ext cx="10515600" cy="1325563"/>
-          </a:xfrm>
-        </p:spPr>
-        <p:txBody>
-          <a:bodyPr/>
-          <a:lstStyle/>
-          <a:p>
-            <a:r>
-              <a:rPr lang="de-AT" sz="6000" b="1" dirty="0"/>
-              <a:t>Sprints &amp; Meilensteine</a:t>
-            </a:r>
-            <a:endParaRPr lang="de-AT" b="1" dirty="0"/>
-          </a:p>
-        </p:txBody>
-      </p:sp>
-      <p:sp>
-        <p:nvSpPr>
-          <p:cNvPr id="3" name="Inhaltsplatzhalter 2">
-            <a:extLst>
-              <a:ext uri="{FF2B5EF4-FFF2-40B4-BE49-F238E27FC236}">
-                <a16:creationId xmlns:a16="http://schemas.microsoft.com/office/drawing/2014/main" id="{9E79BC6A-6AA0-0329-6687-10122C1FFEEE}"/>
-              </a:ext>
-            </a:extLst>
-          </p:cNvPr>
-          <p:cNvSpPr>
-            <a:spLocks noGrp="1"/>
-          </p:cNvSpPr>
-          <p:nvPr>
-            <p:ph idx="1"/>
-          </p:nvPr>
-        </p:nvSpPr>
-        <p:spPr>
-          <a:xfrm>
-            <a:off x="838200" y="1606021"/>
-            <a:ext cx="10515600" cy="4797342"/>
-          </a:xfrm>
-        </p:spPr>
-        <p:txBody>
-          <a:bodyPr>
-            <a:normAutofit lnSpcReduction="10000"/>
-          </a:bodyPr>
-          <a:lstStyle/>
-          <a:p>
-            <a:r>
-              <a:rPr lang="de-DE" sz="2800" b="1" dirty="0"/>
-              <a:t>Sprint 1 Planung</a:t>
-            </a:r>
-          </a:p>
-          <a:p>
-            <a:pPr lvl="1"/>
-            <a:r>
-              <a:rPr lang="de-DE" dirty="0"/>
-              <a:t>Projektsetup</a:t>
-            </a:r>
-          </a:p>
-          <a:p>
-            <a:pPr lvl="1"/>
-            <a:r>
-              <a:rPr lang="de-DE" dirty="0"/>
-              <a:t>User Stories</a:t>
-            </a:r>
-          </a:p>
-          <a:p>
-            <a:pPr lvl="1"/>
-            <a:r>
-              <a:rPr lang="de-DE" dirty="0"/>
-              <a:t>Erste Designs</a:t>
-            </a:r>
-          </a:p>
-          <a:p>
-            <a:pPr marL="457200" lvl="1" indent="0">
-              <a:buNone/>
-            </a:pPr>
-            <a:endParaRPr lang="de-DE" dirty="0"/>
-          </a:p>
-          <a:p>
-            <a:r>
-              <a:rPr lang="de-DE" b="1" dirty="0"/>
-              <a:t>Sprint 2 Planung</a:t>
-            </a:r>
-          </a:p>
-          <a:p>
-            <a:pPr lvl="1"/>
-            <a:r>
-              <a:rPr lang="de-DE" dirty="0"/>
-              <a:t>UI/UX in Figma</a:t>
-            </a:r>
-          </a:p>
-          <a:p>
-            <a:pPr lvl="1"/>
-            <a:r>
-              <a:rPr lang="de-DE" dirty="0"/>
-              <a:t>Start Implementierung</a:t>
-            </a:r>
-          </a:p>
-          <a:p>
-            <a:pPr marL="457200" lvl="1" indent="0">
-              <a:buNone/>
-            </a:pPr>
-            <a:endParaRPr lang="de-DE" dirty="0"/>
-          </a:p>
-          <a:p>
-            <a:r>
-              <a:rPr lang="de-DE" sz="2800" b="1" dirty="0"/>
-              <a:t>Sprint 3 Planung</a:t>
-            </a:r>
-          </a:p>
-          <a:p>
-            <a:pPr lvl="1"/>
-            <a:r>
-              <a:rPr lang="de-DE" dirty="0"/>
-              <a:t>Alle Kernfunktionen</a:t>
-            </a:r>
-          </a:p>
-          <a:p>
-            <a:pPr lvl="1"/>
-            <a:r>
-              <a:rPr lang="de-DE" dirty="0"/>
-              <a:t>Projektabschluss</a:t>
-            </a:r>
-          </a:p>
-        </p:txBody>
-      </p:sp>
-    </p:spTree>
-    <p:extLst>
-      <p:ext uri="{BB962C8B-B14F-4D97-AF65-F5344CB8AC3E}">
-        <p14:creationId xmlns:p14="http://schemas.microsoft.com/office/powerpoint/2010/main" val="2090894282"/>
-      </p:ext>
-    </p:extLst>
-  </p:cSld>
-  <p:clrMapOvr>
-    <a:masterClrMapping/>
-  </p:clrMapOvr>
-</p:sld>
-</file>
-
-<file path=ppt/slides/slide6.xml><?xml version="1.0" encoding="utf-8"?>
 <p:sld xmlns:a="http://schemas.openxmlformats.org/drawingml/2006/main" xmlns:r="http://schemas.openxmlformats.org/officeDocument/2006/relationships" xmlns:p="http://schemas.openxmlformats.org/presentationml/2006/main">
   <p:cSld>
     <p:bg>
@@ -15069,39 +14419,10 @@
           <a:p>
             <a:pPr algn="ctr"/>
             <a:r>
-              <a:rPr lang="en-US" sz="8800" kern="1200" dirty="0" err="1">
-                <a:solidFill>
-                  <a:schemeClr val="tx1"/>
-                </a:solidFill>
-                <a:latin typeface="+mj-lt"/>
-                <a:ea typeface="+mj-ea"/>
-                <a:cs typeface="+mj-cs"/>
-              </a:rPr>
-              <a:t>Ziele</a:t>
+              <a:rPr lang="de-AT" sz="8000" dirty="0"/>
+              <a:t>Anforderungen und Ziele</a:t>
             </a:r>
-            <a:r>
-              <a:rPr lang="en-US" sz="8800" kern="1200" dirty="0">
-                <a:solidFill>
-                  <a:schemeClr val="tx1"/>
-                </a:solidFill>
-                <a:latin typeface="+mj-lt"/>
-                <a:ea typeface="+mj-ea"/>
-                <a:cs typeface="+mj-cs"/>
-              </a:rPr>
-              <a:t> &amp; </a:t>
-            </a:r>
-            <a:r>
-              <a:rPr lang="en-US" sz="8800" kern="1200" dirty="0" err="1">
-                <a:solidFill>
-                  <a:schemeClr val="tx1"/>
-                </a:solidFill>
-                <a:latin typeface="+mj-lt"/>
-                <a:ea typeface="+mj-ea"/>
-                <a:cs typeface="+mj-cs"/>
-              </a:rPr>
-              <a:t>Zielerreichung</a:t>
-            </a:r>
-            <a:endParaRPr lang="en-US" sz="8800" kern="1200" dirty="0">
+            <a:endParaRPr lang="en-US" sz="8000" kern="1200" dirty="0">
               <a:solidFill>
                 <a:schemeClr val="tx1"/>
               </a:solidFill>
@@ -15286,7 +14607,7 @@
 </p:sld>
 </file>
 
-<file path=ppt/slides/slide7.xml><?xml version="1.0" encoding="utf-8"?>
+<file path=ppt/slides/slide6.xml><?xml version="1.0" encoding="utf-8"?>
 <p:sld xmlns:a="http://schemas.openxmlformats.org/drawingml/2006/main" xmlns:r="http://schemas.openxmlformats.org/officeDocument/2006/relationships" xmlns:p="http://schemas.openxmlformats.org/presentationml/2006/main">
   <p:cSld>
     <p:spTree>
@@ -15333,13 +14654,13 @@
         </p:spPr>
         <p:txBody>
           <a:bodyPr>
-            <a:normAutofit fontScale="90000"/>
+            <a:normAutofit/>
           </a:bodyPr>
           <a:lstStyle/>
           <a:p>
             <a:r>
               <a:rPr lang="de-DE" sz="6000" b="1" dirty="0"/>
-              <a:t>Umgesetzte User Stories (Kunde)</a:t>
+              <a:t>Projektziele</a:t>
             </a:r>
             <a:endParaRPr lang="de-AT" b="1" dirty="0"/>
           </a:p>
@@ -15374,32 +14695,32 @@
           <a:lstStyle/>
           <a:p>
             <a:r>
-              <a:rPr lang="de-DE" sz="2800" b="1" dirty="0"/>
-              <a:t>Produkt ansehen &amp; durchsuchen</a:t>
+              <a:rPr lang="de-AT" dirty="0"/>
+              <a:t>moderner und benutzerfreundlicher Webshop</a:t>
             </a:r>
           </a:p>
           <a:p>
             <a:r>
-              <a:rPr lang="de-DE" b="1" dirty="0"/>
-              <a:t>Produktdetails anzeigen</a:t>
+              <a:rPr lang="de-AT" dirty="0"/>
+              <a:t>übersichtliche Produktdarstellung</a:t>
             </a:r>
           </a:p>
           <a:p>
             <a:r>
-              <a:rPr lang="de-DE" b="1" dirty="0"/>
-              <a:t>Warenkorb verwalten</a:t>
+              <a:rPr lang="de-AT" dirty="0"/>
+              <a:t>einfacher Bestellprozess</a:t>
             </a:r>
           </a:p>
           <a:p>
             <a:r>
-              <a:rPr lang="de-DE" b="1" dirty="0"/>
-              <a:t>Bestellung abschließen (Rechnung)</a:t>
+              <a:rPr lang="de-AT" dirty="0"/>
+              <a:t>strukturierter Admin-Bereich</a:t>
             </a:r>
           </a:p>
           <a:p>
             <a:r>
-              <a:rPr lang="de-DE" b="1" dirty="0"/>
-              <a:t>Login &amp; Registrierung</a:t>
+              <a:rPr lang="de-AT" dirty="0"/>
+              <a:t>klare Produktdarstellung</a:t>
             </a:r>
             <a:endParaRPr lang="de-DE" dirty="0"/>
           </a:p>
@@ -15418,7 +14739,7 @@
 </p:sld>
 </file>
 
-<file path=ppt/slides/slide8.xml><?xml version="1.0" encoding="utf-8"?>
+<file path=ppt/slides/slide7.xml><?xml version="1.0" encoding="utf-8"?>
 <p:sld xmlns:a="http://schemas.openxmlformats.org/drawingml/2006/main" xmlns:r="http://schemas.openxmlformats.org/officeDocument/2006/relationships" xmlns:p="http://schemas.openxmlformats.org/presentationml/2006/main">
   <p:cSld>
     <p:spTree>
@@ -15465,13 +14786,13 @@
         </p:spPr>
         <p:txBody>
           <a:bodyPr>
-            <a:normAutofit fontScale="90000"/>
+            <a:normAutofit/>
           </a:bodyPr>
           <a:lstStyle/>
           <a:p>
             <a:r>
               <a:rPr lang="de-DE" sz="6000" b="1" dirty="0"/>
-              <a:t>Umgesetzte User Stories (Admin)</a:t>
+              <a:t>Wichtige Anforderungen</a:t>
             </a:r>
             <a:endParaRPr lang="de-AT" b="1" dirty="0"/>
           </a:p>
@@ -15479,10 +14800,396 @@
       </p:sp>
       <p:sp>
         <p:nvSpPr>
-          <p:cNvPr id="3" name="Inhaltsplatzhalter 2">
+          <p:cNvPr id="5" name="Rectangle 2">
             <a:extLst>
               <a:ext uri="{FF2B5EF4-FFF2-40B4-BE49-F238E27FC236}">
-                <a16:creationId xmlns:a16="http://schemas.microsoft.com/office/drawing/2014/main" id="{4F557850-6BF3-99F6-FEC2-865029388248}"/>
+                <a16:creationId xmlns:a16="http://schemas.microsoft.com/office/drawing/2014/main" id="{B77A4254-4434-2D34-2157-E27DA08D8102}"/>
+              </a:ext>
+            </a:extLst>
+          </p:cNvPr>
+          <p:cNvSpPr>
+            <a:spLocks noGrp="1" noChangeArrowheads="1"/>
+          </p:cNvSpPr>
+          <p:nvPr>
+            <p:ph idx="1"/>
+          </p:nvPr>
+        </p:nvSpPr>
+        <p:spPr bwMode="auto">
+          <a:xfrm>
+            <a:off x="838200" y="1144869"/>
+            <a:ext cx="6246197" cy="5109091"/>
+          </a:xfrm>
+          <a:prstGeom prst="rect">
+            <a:avLst/>
+          </a:prstGeom>
+          <a:noFill/>
+          <a:ln>
+            <a:noFill/>
+          </a:ln>
+          <a:effectLst/>
+          <a:extLst>
+            <a:ext uri="{909E8E84-426E-40DD-AFC4-6F175D3DCCD1}">
+              <a14:hiddenFill xmlns:a14="http://schemas.microsoft.com/office/drawing/2010/main">
+                <a:solidFill>
+                  <a:schemeClr val="accent1"/>
+                </a:solidFill>
+              </a14:hiddenFill>
+            </a:ext>
+            <a:ext uri="{91240B29-F687-4F45-9708-019B960494DF}">
+              <a14:hiddenLine xmlns:a14="http://schemas.microsoft.com/office/drawing/2010/main" w="9525">
+                <a:solidFill>
+                  <a:schemeClr val="tx1"/>
+                </a:solidFill>
+                <a:miter lim="800000"/>
+                <a:headEnd/>
+                <a:tailEnd/>
+              </a14:hiddenLine>
+            </a:ext>
+            <a:ext uri="{AF507438-7753-43E0-B8FC-AC1667EBCBE1}">
+              <a14:hiddenEffects xmlns:a14="http://schemas.microsoft.com/office/drawing/2010/main">
+                <a:effectLst>
+                  <a:outerShdw dist="35921" dir="2700000" algn="ctr" rotWithShape="0">
+                    <a:schemeClr val="bg2"/>
+                  </a:outerShdw>
+                </a:effectLst>
+              </a14:hiddenEffects>
+            </a:ext>
+          </a:extLst>
+        </p:spPr>
+        <p:txBody>
+          <a:bodyPr vert="horz" wrap="none" lIns="91440" tIns="45720" rIns="91440" bIns="45720" numCol="1" anchor="ctr" anchorCtr="0" compatLnSpc="1">
+            <a:prstTxWarp prst="textNoShape">
+              <a:avLst/>
+            </a:prstTxWarp>
+            <a:spAutoFit/>
+          </a:bodyPr>
+          <a:lstStyle/>
+          <a:p>
+            <a:pPr eaLnBrk="0" fontAlgn="base" hangingPunct="0">
+              <a:lnSpc>
+                <a:spcPct val="100000"/>
+              </a:lnSpc>
+              <a:spcBef>
+                <a:spcPct val="0"/>
+              </a:spcBef>
+              <a:spcAft>
+                <a:spcPct val="0"/>
+              </a:spcAft>
+            </a:pPr>
+            <a:endParaRPr kumimoji="0" lang="de-DE" altLang="de-DE" sz="1800" b="0" i="0" u="none" strike="noStrike" cap="none" normalizeH="0" baseline="0" dirty="0">
+              <a:ln>
+                <a:noFill/>
+              </a:ln>
+              <a:solidFill>
+                <a:schemeClr val="tx1"/>
+              </a:solidFill>
+              <a:effectLst/>
+              <a:latin typeface="Arial" panose="020B0604020202020204" pitchFamily="34" charset="0"/>
+            </a:endParaRPr>
+          </a:p>
+          <a:p>
+            <a:pPr eaLnBrk="0" fontAlgn="base" hangingPunct="0">
+              <a:lnSpc>
+                <a:spcPct val="100000"/>
+              </a:lnSpc>
+              <a:spcBef>
+                <a:spcPct val="0"/>
+              </a:spcBef>
+              <a:spcAft>
+                <a:spcPct val="0"/>
+              </a:spcAft>
+            </a:pPr>
+            <a:r>
+              <a:rPr lang="de-DE" altLang="de-DE" dirty="0"/>
+              <a:t>Produktübersicht und Kategorien </a:t>
+            </a:r>
+          </a:p>
+          <a:p>
+            <a:pPr eaLnBrk="0" fontAlgn="base" hangingPunct="0">
+              <a:lnSpc>
+                <a:spcPct val="100000"/>
+              </a:lnSpc>
+              <a:spcBef>
+                <a:spcPct val="0"/>
+              </a:spcBef>
+              <a:spcAft>
+                <a:spcPct val="0"/>
+              </a:spcAft>
+            </a:pPr>
+            <a:r>
+              <a:rPr lang="de-DE" altLang="de-DE" dirty="0"/>
+              <a:t>Suchfunktion </a:t>
+            </a:r>
+          </a:p>
+          <a:p>
+            <a:pPr eaLnBrk="0" fontAlgn="base" hangingPunct="0">
+              <a:lnSpc>
+                <a:spcPct val="100000"/>
+              </a:lnSpc>
+              <a:spcBef>
+                <a:spcPct val="0"/>
+              </a:spcBef>
+              <a:spcAft>
+                <a:spcPct val="0"/>
+              </a:spcAft>
+            </a:pPr>
+            <a:r>
+              <a:rPr lang="de-DE" altLang="de-DE" dirty="0"/>
+              <a:t>Login und Registrierung </a:t>
+            </a:r>
+          </a:p>
+          <a:p>
+            <a:pPr eaLnBrk="0" fontAlgn="base" hangingPunct="0">
+              <a:lnSpc>
+                <a:spcPct val="100000"/>
+              </a:lnSpc>
+              <a:spcBef>
+                <a:spcPct val="0"/>
+              </a:spcBef>
+              <a:spcAft>
+                <a:spcPct val="0"/>
+              </a:spcAft>
+            </a:pPr>
+            <a:r>
+              <a:rPr lang="de-DE" altLang="de-DE" dirty="0"/>
+              <a:t>Warenkorb </a:t>
+            </a:r>
+          </a:p>
+          <a:p>
+            <a:pPr eaLnBrk="0" fontAlgn="base" hangingPunct="0">
+              <a:lnSpc>
+                <a:spcPct val="100000"/>
+              </a:lnSpc>
+              <a:spcBef>
+                <a:spcPct val="0"/>
+              </a:spcBef>
+              <a:spcAft>
+                <a:spcPct val="0"/>
+              </a:spcAft>
+            </a:pPr>
+            <a:r>
+              <a:rPr lang="de-DE" altLang="de-DE" dirty="0" err="1"/>
+              <a:t>Checkout</a:t>
+            </a:r>
+            <a:r>
+              <a:rPr lang="de-DE" altLang="de-DE" dirty="0"/>
+              <a:t> mit Rechnung </a:t>
+            </a:r>
+          </a:p>
+          <a:p>
+            <a:pPr eaLnBrk="0" fontAlgn="base" hangingPunct="0">
+              <a:lnSpc>
+                <a:spcPct val="100000"/>
+              </a:lnSpc>
+              <a:spcBef>
+                <a:spcPct val="0"/>
+              </a:spcBef>
+              <a:spcAft>
+                <a:spcPct val="0"/>
+              </a:spcAft>
+            </a:pPr>
+            <a:r>
+              <a:rPr lang="de-DE" altLang="de-DE" dirty="0"/>
+              <a:t>Produktverwaltung für Admins </a:t>
+            </a:r>
+          </a:p>
+          <a:p>
+            <a:pPr eaLnBrk="0" fontAlgn="base" hangingPunct="0">
+              <a:lnSpc>
+                <a:spcPct val="100000"/>
+              </a:lnSpc>
+              <a:spcBef>
+                <a:spcPct val="0"/>
+              </a:spcBef>
+              <a:spcAft>
+                <a:spcPct val="0"/>
+              </a:spcAft>
+            </a:pPr>
+            <a:r>
+              <a:rPr lang="de-DE" altLang="de-DE" dirty="0"/>
+              <a:t>Übersicht über alle Rechnungen</a:t>
+            </a:r>
+          </a:p>
+          <a:p>
+            <a:pPr eaLnBrk="0" fontAlgn="base" hangingPunct="0">
+              <a:lnSpc>
+                <a:spcPct val="100000"/>
+              </a:lnSpc>
+              <a:spcBef>
+                <a:spcPct val="0"/>
+              </a:spcBef>
+              <a:spcAft>
+                <a:spcPct val="0"/>
+              </a:spcAft>
+            </a:pPr>
+            <a:r>
+              <a:rPr lang="de-DE" altLang="de-DE" dirty="0"/>
+              <a:t>Anzeige der meistverkauften Produkte</a:t>
+            </a:r>
+          </a:p>
+          <a:p>
+            <a:pPr eaLnBrk="0" fontAlgn="base" hangingPunct="0">
+              <a:lnSpc>
+                <a:spcPct val="100000"/>
+              </a:lnSpc>
+              <a:spcBef>
+                <a:spcPct val="0"/>
+              </a:spcBef>
+              <a:spcAft>
+                <a:spcPct val="0"/>
+              </a:spcAft>
+            </a:pPr>
+            <a:r>
+              <a:rPr lang="de-DE" altLang="de-DE" dirty="0"/>
+              <a:t>Produktempfehlung (Topseller)</a:t>
+            </a:r>
+          </a:p>
+          <a:p>
+            <a:pPr eaLnBrk="0" fontAlgn="base" hangingPunct="0">
+              <a:lnSpc>
+                <a:spcPct val="100000"/>
+              </a:lnSpc>
+              <a:spcBef>
+                <a:spcPct val="0"/>
+              </a:spcBef>
+              <a:spcAft>
+                <a:spcPct val="0"/>
+              </a:spcAft>
+            </a:pPr>
+            <a:r>
+              <a:rPr lang="de-DE" altLang="de-DE" dirty="0"/>
+              <a:t>Favoritenliste</a:t>
+            </a:r>
+          </a:p>
+          <a:p>
+            <a:pPr eaLnBrk="0" fontAlgn="base" hangingPunct="0">
+              <a:lnSpc>
+                <a:spcPct val="100000"/>
+              </a:lnSpc>
+              <a:spcBef>
+                <a:spcPct val="0"/>
+              </a:spcBef>
+              <a:spcAft>
+                <a:spcPct val="0"/>
+              </a:spcAft>
+            </a:pPr>
+            <a:r>
+              <a:rPr lang="de-DE" altLang="de-DE" dirty="0"/>
+              <a:t>Produktvergleich</a:t>
+            </a:r>
+          </a:p>
+        </p:txBody>
+      </p:sp>
+    </p:spTree>
+    <p:extLst>
+      <p:ext uri="{BB962C8B-B14F-4D97-AF65-F5344CB8AC3E}">
+        <p14:creationId xmlns:p14="http://schemas.microsoft.com/office/powerpoint/2010/main" val="4231603890"/>
+      </p:ext>
+    </p:extLst>
+  </p:cSld>
+  <p:clrMapOvr>
+    <a:masterClrMapping/>
+  </p:clrMapOvr>
+</p:sld>
+</file>
+
+<file path=ppt/slides/slide8.xml><?xml version="1.0" encoding="utf-8"?>
+<p:sld xmlns:a="http://schemas.openxmlformats.org/drawingml/2006/main" xmlns:r="http://schemas.openxmlformats.org/officeDocument/2006/relationships" xmlns:p="http://schemas.openxmlformats.org/presentationml/2006/main">
+  <p:cSld>
+    <p:bg>
+      <p:bgPr>
+        <a:solidFill>
+          <a:schemeClr val="bg1"/>
+        </a:solidFill>
+        <a:effectLst/>
+      </p:bgPr>
+    </p:bg>
+    <p:spTree>
+      <p:nvGrpSpPr>
+        <p:cNvPr id="1" name="">
+          <a:extLst>
+            <a:ext uri="{FF2B5EF4-FFF2-40B4-BE49-F238E27FC236}">
+              <a16:creationId xmlns:a16="http://schemas.microsoft.com/office/drawing/2014/main" id="{EBD6E14D-4609-C2D5-61C2-D0175B4FA1FF}"/>
+            </a:ext>
+          </a:extLst>
+        </p:cNvPr>
+        <p:cNvGrpSpPr/>
+        <p:nvPr/>
+      </p:nvGrpSpPr>
+      <p:grpSpPr>
+        <a:xfrm>
+          <a:off x="0" y="0"/>
+          <a:ext cx="0" cy="0"/>
+          <a:chOff x="0" y="0"/>
+          <a:chExt cx="0" cy="0"/>
+        </a:xfrm>
+      </p:grpSpPr>
+      <p:sp useBgFill="1">
+        <p:nvSpPr>
+          <p:cNvPr id="15" name="Rectangle 8">
+            <a:extLst>
+              <a:ext uri="{FF2B5EF4-FFF2-40B4-BE49-F238E27FC236}">
+                <a16:creationId xmlns:a16="http://schemas.microsoft.com/office/drawing/2014/main" id="{DAF9A5F1-A4D7-2282-8768-92EECF399170}"/>
+              </a:ext>
+              <a:ext uri="{C183D7F6-B498-43B3-948B-1728B52AA6E4}">
+                <adec:decorative xmlns:adec="http://schemas.microsoft.com/office/drawing/2017/decorative" val="1"/>
+              </a:ext>
+            </a:extLst>
+          </p:cNvPr>
+          <p:cNvSpPr>
+            <a:spLocks noGrp="1" noRot="1" noChangeAspect="1" noMove="1" noResize="1" noEditPoints="1" noAdjustHandles="1" noChangeArrowheads="1" noChangeShapeType="1" noTextEdit="1"/>
+          </p:cNvSpPr>
+          <p:nvPr>
+            <p:extLst>
+              <p:ext uri="{386F3935-93C4-4BCD-93E2-E3B085C9AB24}">
+                <p16:designElem xmlns:p16="http://schemas.microsoft.com/office/powerpoint/2015/main" val="1"/>
+              </p:ext>
+            </p:extLst>
+          </p:nvPr>
+        </p:nvSpPr>
+        <p:spPr>
+          <a:xfrm>
+            <a:off x="0" y="0"/>
+            <a:ext cx="12192000" cy="6858000"/>
+          </a:xfrm>
+          <a:prstGeom prst="rect">
+            <a:avLst/>
+          </a:prstGeom>
+          <a:ln>
+            <a:noFill/>
+          </a:ln>
+        </p:spPr>
+        <p:style>
+          <a:lnRef idx="2">
+            <a:schemeClr val="accent1">
+              <a:shade val="50000"/>
+            </a:schemeClr>
+          </a:lnRef>
+          <a:fillRef idx="1">
+            <a:schemeClr val="accent1"/>
+          </a:fillRef>
+          <a:effectRef idx="0">
+            <a:schemeClr val="accent1"/>
+          </a:effectRef>
+          <a:fontRef idx="minor">
+            <a:schemeClr val="lt1"/>
+          </a:fontRef>
+        </p:style>
+        <p:txBody>
+          <a:bodyPr rtlCol="0" anchor="ctr"/>
+          <a:lstStyle/>
+          <a:p>
+            <a:pPr algn="ctr"/>
+            <a:endParaRPr lang="en-US"/>
+          </a:p>
+        </p:txBody>
+      </p:sp>
+      <p:sp>
+        <p:nvSpPr>
+          <p:cNvPr id="4" name="Titel 3">
+            <a:extLst>
+              <a:ext uri="{FF2B5EF4-FFF2-40B4-BE49-F238E27FC236}">
+                <a16:creationId xmlns:a16="http://schemas.microsoft.com/office/drawing/2014/main" id="{673C6858-3319-B7DD-7F89-56BC652E208F}"/>
               </a:ext>
             </a:extLst>
           </p:cNvPr>
@@ -15490,77 +15197,202 @@
             <a:spLocks noGrp="1"/>
           </p:cNvSpPr>
           <p:nvPr>
-            <p:ph idx="1"/>
+            <p:ph type="title"/>
           </p:nvPr>
         </p:nvSpPr>
         <p:spPr>
           <a:xfrm>
-            <a:off x="838200" y="1606021"/>
-            <a:ext cx="10515600" cy="4797342"/>
+            <a:off x="558210" y="1365472"/>
+            <a:ext cx="10978470" cy="3564636"/>
           </a:xfrm>
         </p:spPr>
         <p:txBody>
-          <a:bodyPr>
+          <a:bodyPr vert="horz" lIns="91440" tIns="45720" rIns="91440" bIns="45720" rtlCol="0" anchor="ctr">
             <a:normAutofit/>
           </a:bodyPr>
           <a:lstStyle/>
           <a:p>
+            <a:pPr algn="ctr"/>
             <a:r>
-              <a:rPr lang="de-DE" sz="2800" b="1" dirty="0"/>
-              <a:t>Admin Login</a:t>
+              <a:rPr lang="de-AT" sz="8000" dirty="0"/>
+              <a:t>Projektergebnisse</a:t>
             </a:r>
-          </a:p>
-          <a:p>
-            <a:r>
-              <a:rPr lang="de-DE" b="1" dirty="0"/>
-              <a:t>Produkte &amp; Kategorien</a:t>
-            </a:r>
-          </a:p>
-          <a:p>
-            <a:pPr lvl="1"/>
-            <a:r>
-              <a:rPr lang="de-DE" dirty="0"/>
-              <a:t>Anlegen</a:t>
-            </a:r>
-          </a:p>
-          <a:p>
-            <a:pPr lvl="1"/>
-            <a:r>
-              <a:rPr lang="de-DE" dirty="0"/>
-              <a:t>Bearbeiten</a:t>
-            </a:r>
-          </a:p>
-          <a:p>
-            <a:pPr lvl="1"/>
-            <a:r>
-              <a:rPr lang="de-DE" dirty="0"/>
-              <a:t>Löschen</a:t>
-            </a:r>
-          </a:p>
-          <a:p>
-            <a:r>
-              <a:rPr lang="de-DE" b="1" dirty="0"/>
-              <a:t>Lagerbestand einsehen</a:t>
-            </a:r>
-          </a:p>
-          <a:p>
-            <a:r>
-              <a:rPr lang="de-DE" b="1" dirty="0"/>
-              <a:t>Strukturierter Admin Bereich</a:t>
-            </a:r>
-          </a:p>
-          <a:p>
-            <a:pPr marL="457200" lvl="1" indent="0">
+            <a:endParaRPr lang="en-US" sz="8000" kern="1200" dirty="0">
+              <a:solidFill>
+                <a:schemeClr val="tx1"/>
+              </a:solidFill>
+              <a:latin typeface="+mj-lt"/>
+              <a:ea typeface="+mj-ea"/>
+              <a:cs typeface="+mj-cs"/>
+            </a:endParaRPr>
+          </a:p>
+        </p:txBody>
+      </p:sp>
+      <p:sp>
+        <p:nvSpPr>
+          <p:cNvPr id="16" name="Rectangle 10">
+            <a:extLst>
+              <a:ext uri="{FF2B5EF4-FFF2-40B4-BE49-F238E27FC236}">
+                <a16:creationId xmlns:a16="http://schemas.microsoft.com/office/drawing/2014/main" id="{63DD4859-23EC-AA06-A745-3283CD4A117C}"/>
+              </a:ext>
+              <a:ext uri="{C183D7F6-B498-43B3-948B-1728B52AA6E4}">
+                <adec:decorative xmlns:adec="http://schemas.microsoft.com/office/drawing/2017/decorative" val="1"/>
+              </a:ext>
+            </a:extLst>
+          </p:cNvPr>
+          <p:cNvSpPr>
+            <a:spLocks noGrp="1" noRot="1" noChangeAspect="1" noMove="1" noResize="1" noEditPoints="1" noAdjustHandles="1" noChangeArrowheads="1" noChangeShapeType="1" noTextEdit="1"/>
+          </p:cNvSpPr>
+          <p:nvPr>
+            <p:extLst>
+              <p:ext uri="{386F3935-93C4-4BCD-93E2-E3B085C9AB24}">
+                <p16:designElem xmlns:p16="http://schemas.microsoft.com/office/powerpoint/2015/main" val="1"/>
+              </p:ext>
+            </p:extLst>
+          </p:nvPr>
+        </p:nvSpPr>
+        <p:spPr>
+          <a:xfrm>
+            <a:off x="0" y="1913350"/>
+            <a:ext cx="128016" cy="2468880"/>
+          </a:xfrm>
+          <a:prstGeom prst="rect">
+            <a:avLst/>
+          </a:prstGeom>
+          <a:solidFill>
+            <a:schemeClr val="accent2"/>
+          </a:solidFill>
+          <a:ln>
+            <a:noFill/>
+          </a:ln>
+        </p:spPr>
+        <p:style>
+          <a:lnRef idx="2">
+            <a:schemeClr val="accent1">
+              <a:shade val="50000"/>
+            </a:schemeClr>
+          </a:lnRef>
+          <a:fillRef idx="1">
+            <a:schemeClr val="accent1"/>
+          </a:fillRef>
+          <a:effectRef idx="0">
+            <a:schemeClr val="accent1"/>
+          </a:effectRef>
+          <a:fontRef idx="minor">
+            <a:schemeClr val="lt1"/>
+          </a:fontRef>
+        </p:style>
+        <p:txBody>
+          <a:bodyPr rtlCol="0" anchor="ctr"/>
+          <a:lstStyle/>
+          <a:p>
+            <a:pPr marL="0" marR="0" lvl="0" indent="0" algn="ctr" defTabSz="914400" rtl="0" eaLnBrk="1" fontAlgn="auto" latinLnBrk="0" hangingPunct="1">
+              <a:lnSpc>
+                <a:spcPct val="100000"/>
+              </a:lnSpc>
+              <a:spcBef>
+                <a:spcPts val="0"/>
+              </a:spcBef>
+              <a:spcAft>
+                <a:spcPts val="0"/>
+              </a:spcAft>
+              <a:buClrTx/>
+              <a:buSzTx/>
+              <a:buFontTx/>
               <a:buNone/>
+              <a:tabLst/>
+              <a:defRPr/>
             </a:pPr>
-            <a:endParaRPr lang="de-DE" b="1" dirty="0"/>
+            <a:endParaRPr kumimoji="0" lang="en-US" sz="1800" b="0" i="0" u="none" strike="noStrike" kern="1200" cap="none" spc="0" normalizeH="0" baseline="0" noProof="0" dirty="0">
+              <a:ln>
+                <a:noFill/>
+              </a:ln>
+              <a:solidFill>
+                <a:prstClr val="white"/>
+              </a:solidFill>
+              <a:effectLst/>
+              <a:uLnTx/>
+              <a:uFillTx/>
+              <a:latin typeface="Calibri" panose="020F0502020204030204"/>
+              <a:ea typeface="+mn-ea"/>
+              <a:cs typeface="+mn-cs"/>
+            </a:endParaRPr>
+          </a:p>
+        </p:txBody>
+      </p:sp>
+      <p:sp>
+        <p:nvSpPr>
+          <p:cNvPr id="17" name="Rectangle 12">
+            <a:extLst>
+              <a:ext uri="{FF2B5EF4-FFF2-40B4-BE49-F238E27FC236}">
+                <a16:creationId xmlns:a16="http://schemas.microsoft.com/office/drawing/2014/main" id="{3C6F1596-64A9-1573-D3BD-1B9D02AEFF39}"/>
+              </a:ext>
+              <a:ext uri="{C183D7F6-B498-43B3-948B-1728B52AA6E4}">
+                <adec:decorative xmlns:adec="http://schemas.microsoft.com/office/drawing/2017/decorative" val="1"/>
+              </a:ext>
+            </a:extLst>
+          </p:cNvPr>
+          <p:cNvSpPr>
+            <a:spLocks noGrp="1" noRot="1" noChangeAspect="1" noMove="1" noResize="1" noEditPoints="1" noAdjustHandles="1" noChangeArrowheads="1" noChangeShapeType="1" noTextEdit="1"/>
+          </p:cNvSpPr>
+          <p:nvPr>
+            <p:extLst>
+              <p:ext uri="{386F3935-93C4-4BCD-93E2-E3B085C9AB24}">
+                <p16:designElem xmlns:p16="http://schemas.microsoft.com/office/powerpoint/2015/main" val="1"/>
+              </p:ext>
+            </p:extLst>
+          </p:nvPr>
+        </p:nvSpPr>
+        <p:spPr>
+          <a:xfrm>
+            <a:off x="650945" y="5831269"/>
+            <a:ext cx="10927080" cy="18288"/>
+          </a:xfrm>
+          <a:prstGeom prst="rect">
+            <a:avLst/>
+          </a:prstGeom>
+          <a:solidFill>
+            <a:srgbClr val="D5D5D5"/>
+          </a:solidFill>
+          <a:ln w="3175">
+            <a:noFill/>
+          </a:ln>
+          <a:effectLst/>
+        </p:spPr>
+        <p:style>
+          <a:lnRef idx="2">
+            <a:schemeClr val="accent1">
+              <a:shade val="50000"/>
+            </a:schemeClr>
+          </a:lnRef>
+          <a:fillRef idx="1">
+            <a:schemeClr val="accent1"/>
+          </a:fillRef>
+          <a:effectRef idx="0">
+            <a:schemeClr val="accent1"/>
+          </a:effectRef>
+          <a:fontRef idx="minor">
+            <a:schemeClr val="lt1"/>
+          </a:fontRef>
+        </p:style>
+        <p:txBody>
+          <a:bodyPr rtlCol="0" anchor="ctr"/>
+          <a:lstStyle/>
+          <a:p>
+            <a:pPr algn="ctr"/>
+            <a:endParaRPr lang="en-US">
+              <a:solidFill>
+                <a:prstClr val="white"/>
+              </a:solidFill>
+              <a:latin typeface="Calibri" panose="020F0502020204030204"/>
+            </a:endParaRPr>
           </a:p>
         </p:txBody>
       </p:sp>
     </p:spTree>
     <p:extLst>
       <p:ext uri="{BB962C8B-B14F-4D97-AF65-F5344CB8AC3E}">
-        <p14:creationId xmlns:p14="http://schemas.microsoft.com/office/powerpoint/2010/main" val="4231603890"/>
+        <p14:creationId xmlns:p14="http://schemas.microsoft.com/office/powerpoint/2010/main" val="3510554188"/>
       </p:ext>
     </p:extLst>
   </p:cSld>
@@ -15623,7 +15455,7 @@
           <a:p>
             <a:r>
               <a:rPr lang="de-DE" sz="6000" b="1" dirty="0"/>
-              <a:t>Fertiggestellte Features</a:t>
+              <a:t>Projektergebnisse</a:t>
             </a:r>
             <a:endParaRPr lang="de-AT" b="1" dirty="0"/>
           </a:p>
@@ -15648,53 +15480,71 @@
         <p:spPr>
           <a:xfrm>
             <a:off x="838200" y="1606021"/>
-            <a:ext cx="10515600" cy="4797342"/>
+            <a:ext cx="10515600" cy="3817317"/>
           </a:xfrm>
         </p:spPr>
         <p:txBody>
           <a:bodyPr>
-            <a:normAutofit/>
+            <a:normAutofit fontScale="92500" lnSpcReduction="20000"/>
           </a:bodyPr>
           <a:lstStyle/>
           <a:p>
+            <a:pPr marL="0" indent="0">
+              <a:buNone/>
+            </a:pPr>
             <a:r>
-              <a:rPr lang="de-DE" sz="2800" b="1" dirty="0"/>
-              <a:t>Produktübersicht</a:t>
+              <a:rPr lang="de-AT" b="1" dirty="0"/>
+              <a:t>Kundenbereich</a:t>
             </a:r>
+          </a:p>
+          <a:p>
             <a:r>
-              <a:rPr lang="de-DE" b="1" dirty="0"/>
-              <a:t> &amp; Kategorien</a:t>
+              <a:rPr lang="de-DE" dirty="0"/>
+              <a:t>Produkte durchsuchen</a:t>
             </a:r>
           </a:p>
           <a:p>
             <a:r>
-              <a:rPr lang="de-DE" b="1" dirty="0"/>
-              <a:t>Suchfunktion</a:t>
+              <a:rPr lang="de-DE" dirty="0"/>
+              <a:t>Produktdetails anzeigen</a:t>
             </a:r>
           </a:p>
           <a:p>
             <a:r>
-              <a:rPr lang="de-DE" b="1" dirty="0"/>
-              <a:t>Warenkorb</a:t>
+              <a:rPr lang="de-DE" dirty="0"/>
+              <a:t>Warenkorb verwalten</a:t>
             </a:r>
           </a:p>
           <a:p>
             <a:r>
-              <a:rPr lang="de-DE" b="1" dirty="0"/>
-              <a:t>Rechnungserstellung</a:t>
+              <a:rPr lang="de-DE" dirty="0"/>
+              <a:t>Bestellung abschließen</a:t>
             </a:r>
           </a:p>
           <a:p>
             <a:r>
-              <a:rPr lang="de-DE" b="1" dirty="0"/>
-              <a:t>Fehlerbehandlung</a:t>
+              <a:rPr lang="de-DE" dirty="0"/>
+              <a:t>Rechnung generieren</a:t>
             </a:r>
           </a:p>
           <a:p>
             <a:r>
-              <a:rPr lang="de-DE" b="1" dirty="0"/>
-              <a:t>Über-uns &amp; Kontaktseite</a:t>
+              <a:rPr lang="de-DE" dirty="0"/>
+              <a:t>Favoritenliste verwenden</a:t>
             </a:r>
+          </a:p>
+          <a:p>
+            <a:r>
+              <a:rPr lang="de-DE" dirty="0"/>
+              <a:t>Topseller-Empfehlungen erhalten</a:t>
+            </a:r>
+          </a:p>
+          <a:p>
+            <a:r>
+              <a:rPr lang="de-DE" dirty="0"/>
+              <a:t>Artikel vergleichen</a:t>
+            </a:r>
+            <a:endParaRPr lang="de-AT" b="1" dirty="0"/>
           </a:p>
         </p:txBody>
       </p:sp>
